--- a/The Manley Variable Mu.pptx
+++ b/The Manley Variable Mu.pptx
@@ -7,6 +7,17 @@
   <p:sldIdLst>
     <p:sldId id="256" r:id="rId2"/>
     <p:sldId id="257" r:id="rId3"/>
+    <p:sldId id="258" r:id="rId4"/>
+    <p:sldId id="259" r:id="rId5"/>
+    <p:sldId id="260" r:id="rId6"/>
+    <p:sldId id="261" r:id="rId7"/>
+    <p:sldId id="263" r:id="rId8"/>
+    <p:sldId id="262" r:id="rId9"/>
+    <p:sldId id="264" r:id="rId10"/>
+    <p:sldId id="265" r:id="rId11"/>
+    <p:sldId id="266" r:id="rId12"/>
+    <p:sldId id="267" r:id="rId13"/>
+    <p:sldId id="268" r:id="rId14"/>
   </p:sldIdLst>
   <p:sldSz cx="12192000" cy="6858000"/>
   <p:notesSz cx="6858000" cy="9144000"/>
@@ -105,6 +116,11 @@
       </a:defRPr>
     </a:lvl9pPr>
   </p:defaultTextStyle>
+  <p:extLst>
+    <p:ext uri="{EFAFB233-063F-42B5-8137-9DF3F51BA10A}">
+      <p15:sldGuideLst xmlns:p15="http://schemas.microsoft.com/office/powerpoint/2012/main"/>
+    </p:ext>
+  </p:extLst>
 </p:presentation>
 </file>
 
@@ -255,7 +271,7 @@
           <a:p>
             <a:fld id="{28257935-AA50-4C6B-BBDA-2B90FA0B9FA3}" type="datetimeFigureOut">
               <a:rPr lang="en-US" smtClean="0"/>
-              <a:t>2/26/2026</a:t>
+              <a:t>2/28/2026</a:t>
             </a:fld>
             <a:endParaRPr lang="en-US"/>
           </a:p>
@@ -453,7 +469,7 @@
           <a:p>
             <a:fld id="{28257935-AA50-4C6B-BBDA-2B90FA0B9FA3}" type="datetimeFigureOut">
               <a:rPr lang="en-US" smtClean="0"/>
-              <a:t>2/26/2026</a:t>
+              <a:t>2/28/2026</a:t>
             </a:fld>
             <a:endParaRPr lang="en-US"/>
           </a:p>
@@ -661,7 +677,7 @@
           <a:p>
             <a:fld id="{28257935-AA50-4C6B-BBDA-2B90FA0B9FA3}" type="datetimeFigureOut">
               <a:rPr lang="en-US" smtClean="0"/>
-              <a:t>2/26/2026</a:t>
+              <a:t>2/28/2026</a:t>
             </a:fld>
             <a:endParaRPr lang="en-US"/>
           </a:p>
@@ -859,7 +875,7 @@
           <a:p>
             <a:fld id="{28257935-AA50-4C6B-BBDA-2B90FA0B9FA3}" type="datetimeFigureOut">
               <a:rPr lang="en-US" smtClean="0"/>
-              <a:t>2/26/2026</a:t>
+              <a:t>2/28/2026</a:t>
             </a:fld>
             <a:endParaRPr lang="en-US"/>
           </a:p>
@@ -1134,7 +1150,7 @@
           <a:p>
             <a:fld id="{28257935-AA50-4C6B-BBDA-2B90FA0B9FA3}" type="datetimeFigureOut">
               <a:rPr lang="en-US" smtClean="0"/>
-              <a:t>2/26/2026</a:t>
+              <a:t>2/28/2026</a:t>
             </a:fld>
             <a:endParaRPr lang="en-US"/>
           </a:p>
@@ -1399,7 +1415,7 @@
           <a:p>
             <a:fld id="{28257935-AA50-4C6B-BBDA-2B90FA0B9FA3}" type="datetimeFigureOut">
               <a:rPr lang="en-US" smtClean="0"/>
-              <a:t>2/26/2026</a:t>
+              <a:t>2/28/2026</a:t>
             </a:fld>
             <a:endParaRPr lang="en-US"/>
           </a:p>
@@ -1811,7 +1827,7 @@
           <a:p>
             <a:fld id="{28257935-AA50-4C6B-BBDA-2B90FA0B9FA3}" type="datetimeFigureOut">
               <a:rPr lang="en-US" smtClean="0"/>
-              <a:t>2/26/2026</a:t>
+              <a:t>2/28/2026</a:t>
             </a:fld>
             <a:endParaRPr lang="en-US"/>
           </a:p>
@@ -1952,7 +1968,7 @@
           <a:p>
             <a:fld id="{28257935-AA50-4C6B-BBDA-2B90FA0B9FA3}" type="datetimeFigureOut">
               <a:rPr lang="en-US" smtClean="0"/>
-              <a:t>2/26/2026</a:t>
+              <a:t>2/28/2026</a:t>
             </a:fld>
             <a:endParaRPr lang="en-US"/>
           </a:p>
@@ -2065,7 +2081,7 @@
           <a:p>
             <a:fld id="{28257935-AA50-4C6B-BBDA-2B90FA0B9FA3}" type="datetimeFigureOut">
               <a:rPr lang="en-US" smtClean="0"/>
-              <a:t>2/26/2026</a:t>
+              <a:t>2/28/2026</a:t>
             </a:fld>
             <a:endParaRPr lang="en-US"/>
           </a:p>
@@ -2376,7 +2392,7 @@
           <a:p>
             <a:fld id="{28257935-AA50-4C6B-BBDA-2B90FA0B9FA3}" type="datetimeFigureOut">
               <a:rPr lang="en-US" smtClean="0"/>
-              <a:t>2/26/2026</a:t>
+              <a:t>2/28/2026</a:t>
             </a:fld>
             <a:endParaRPr lang="en-US"/>
           </a:p>
@@ -2664,7 +2680,7 @@
           <a:p>
             <a:fld id="{28257935-AA50-4C6B-BBDA-2B90FA0B9FA3}" type="datetimeFigureOut">
               <a:rPr lang="en-US" smtClean="0"/>
-              <a:t>2/26/2026</a:t>
+              <a:t>2/28/2026</a:t>
             </a:fld>
             <a:endParaRPr lang="en-US"/>
           </a:p>
@@ -2905,7 +2921,7 @@
           <a:p>
             <a:fld id="{28257935-AA50-4C6B-BBDA-2B90FA0B9FA3}" type="datetimeFigureOut">
               <a:rPr lang="en-US" smtClean="0"/>
-              <a:t>2/26/2026</a:t>
+              <a:t>2/28/2026</a:t>
             </a:fld>
             <a:endParaRPr lang="en-US"/>
           </a:p>
@@ -3322,6 +3338,37 @@
           <a:chExt cx="0" cy="0"/>
         </a:xfrm>
       </p:grpSpPr>
+      <p:pic>
+        <p:nvPicPr>
+          <p:cNvPr id="5" name="Picture 4">
+            <a:extLst>
+              <a:ext uri="{FF2B5EF4-FFF2-40B4-BE49-F238E27FC236}">
+                <a16:creationId xmlns:a16="http://schemas.microsoft.com/office/drawing/2014/main" id="{21C23DF3-DD33-057B-F250-CA298149D6CB}"/>
+              </a:ext>
+            </a:extLst>
+          </p:cNvPr>
+          <p:cNvPicPr>
+            <a:picLocks noChangeAspect="1"/>
+          </p:cNvPicPr>
+          <p:nvPr/>
+        </p:nvPicPr>
+        <p:blipFill>
+          <a:blip r:embed="rId2"/>
+          <a:srcRect l="12324" t="130" r="12324" b="24486"/>
+          <a:stretch>
+            <a:fillRect/>
+          </a:stretch>
+        </p:blipFill>
+        <p:spPr>
+          <a:xfrm>
+            <a:off x="0" y="0"/>
+            <a:ext cx="12192000" cy="6858000"/>
+          </a:xfrm>
+          <a:prstGeom prst="rect">
+            <a:avLst/>
+          </a:prstGeom>
+        </p:spPr>
+      </p:pic>
       <p:sp>
         <p:nvSpPr>
           <p:cNvPr id="2" name="Title 1">
@@ -3338,13 +3385,23 @@
             <p:ph type="ctrTitle"/>
           </p:nvPr>
         </p:nvSpPr>
-        <p:spPr/>
-        <p:txBody>
-          <a:bodyPr/>
-          <a:lstStyle/>
-          <a:p>
-            <a:r>
-              <a:rPr lang="en-US" dirty="0"/>
+        <p:spPr>
+          <a:xfrm>
+            <a:off x="3048000" y="5346699"/>
+            <a:ext cx="9144000" cy="944563"/>
+          </a:xfrm>
+        </p:spPr>
+        <p:txBody>
+          <a:bodyPr/>
+          <a:lstStyle/>
+          <a:p>
+            <a:pPr algn="r"/>
+            <a:r>
+              <a:rPr lang="en-US" dirty="0">
+                <a:solidFill>
+                  <a:schemeClr val="bg2"/>
+                </a:solidFill>
+              </a:rPr>
               <a:t>The Manley Variable Mu</a:t>
             </a:r>
           </a:p>
@@ -3366,22 +3423,717 @@
             <p:ph type="subTitle" idx="1"/>
           </p:nvPr>
         </p:nvSpPr>
-        <p:spPr/>
-        <p:txBody>
-          <a:bodyPr/>
-          <a:lstStyle/>
-          <a:p>
-            <a:r>
-              <a:rPr lang="en-US" dirty="0"/>
-              <a:t>Great for mastering, but not by itself</a:t>
-            </a:r>
-          </a:p>
-        </p:txBody>
-      </p:sp>
+        <p:spPr>
+          <a:xfrm>
+            <a:off x="3048000" y="6383338"/>
+            <a:ext cx="9144000" cy="474662"/>
+          </a:xfrm>
+        </p:spPr>
+        <p:txBody>
+          <a:bodyPr/>
+          <a:lstStyle/>
+          <a:p>
+            <a:pPr algn="r"/>
+            <a:r>
+              <a:rPr lang="en-US" dirty="0">
+                <a:solidFill>
+                  <a:schemeClr val="bg2"/>
+                </a:solidFill>
+              </a:rPr>
+              <a:t>Excellent tube compressor, but not an end-all</a:t>
+            </a:r>
+          </a:p>
+        </p:txBody>
+      </p:sp>
+      <p:pic>
+        <p:nvPicPr>
+          <p:cNvPr id="2050" name="Picture 2" descr="Download HD Mew - Pokémon Mew Vector Transparent PNG Image - NicePNG.com">
+            <a:extLst>
+              <a:ext uri="{FF2B5EF4-FFF2-40B4-BE49-F238E27FC236}">
+                <a16:creationId xmlns:a16="http://schemas.microsoft.com/office/drawing/2014/main" id="{82258B8E-F08B-DB80-8415-91F7804A84A9}"/>
+              </a:ext>
+            </a:extLst>
+          </p:cNvPr>
+          <p:cNvPicPr>
+            <a:picLocks noChangeAspect="1" noChangeArrowheads="1"/>
+          </p:cNvPicPr>
+          <p:nvPr/>
+        </p:nvPicPr>
+        <p:blipFill>
+          <a:blip r:embed="rId3">
+            <a:extLst>
+              <a:ext uri="{28A0092B-C50C-407E-A947-70E740481C1C}">
+                <a14:useLocalDpi xmlns:a14="http://schemas.microsoft.com/office/drawing/2010/main" val="0"/>
+              </a:ext>
+            </a:extLst>
+          </a:blip>
+          <a:srcRect/>
+          <a:stretch>
+            <a:fillRect/>
+          </a:stretch>
+        </p:blipFill>
+        <p:spPr bwMode="auto">
+          <a:xfrm>
+            <a:off x="-1406983" y="5991226"/>
+            <a:ext cx="2129502" cy="1733548"/>
+          </a:xfrm>
+          <a:prstGeom prst="rect">
+            <a:avLst/>
+          </a:prstGeom>
+          <a:noFill/>
+          <a:extLst>
+            <a:ext uri="{909E8E84-426E-40DD-AFC4-6F175D3DCCD1}">
+              <a14:hiddenFill xmlns:a14="http://schemas.microsoft.com/office/drawing/2010/main">
+                <a:solidFill>
+                  <a:srgbClr val="FFFFFF"/>
+                </a:solidFill>
+              </a14:hiddenFill>
+            </a:ext>
+          </a:extLst>
+        </p:spPr>
+      </p:pic>
     </p:spTree>
     <p:extLst>
       <p:ext uri="{BB962C8B-B14F-4D97-AF65-F5344CB8AC3E}">
         <p14:creationId xmlns:p14="http://schemas.microsoft.com/office/powerpoint/2010/main" val="1753063399"/>
+      </p:ext>
+    </p:extLst>
+  </p:cSld>
+  <p:clrMapOvr>
+    <a:masterClrMapping/>
+  </p:clrMapOvr>
+</p:sld>
+</file>
+
+<file path=ppt/slides/slide10.xml><?xml version="1.0" encoding="utf-8"?>
+<p:sld xmlns:a="http://schemas.openxmlformats.org/drawingml/2006/main" xmlns:r="http://schemas.openxmlformats.org/officeDocument/2006/relationships" xmlns:p="http://schemas.openxmlformats.org/presentationml/2006/main">
+  <p:cSld>
+    <p:spTree>
+      <p:nvGrpSpPr>
+        <p:cNvPr id="1" name="">
+          <a:extLst>
+            <a:ext uri="{FF2B5EF4-FFF2-40B4-BE49-F238E27FC236}">
+              <a16:creationId xmlns:a16="http://schemas.microsoft.com/office/drawing/2014/main" id="{6F9D0B3A-84E3-1AF6-112B-EC40C498B23A}"/>
+            </a:ext>
+          </a:extLst>
+        </p:cNvPr>
+        <p:cNvGrpSpPr/>
+        <p:nvPr/>
+      </p:nvGrpSpPr>
+      <p:grpSpPr>
+        <a:xfrm>
+          <a:off x="0" y="0"/>
+          <a:ext cx="0" cy="0"/>
+          <a:chOff x="0" y="0"/>
+          <a:chExt cx="0" cy="0"/>
+        </a:xfrm>
+      </p:grpSpPr>
+      <p:sp>
+        <p:nvSpPr>
+          <p:cNvPr id="2" name="Title 1">
+            <a:extLst>
+              <a:ext uri="{FF2B5EF4-FFF2-40B4-BE49-F238E27FC236}">
+                <a16:creationId xmlns:a16="http://schemas.microsoft.com/office/drawing/2014/main" id="{025C6744-686E-0421-99A2-95B87A9B142E}"/>
+              </a:ext>
+            </a:extLst>
+          </p:cNvPr>
+          <p:cNvSpPr>
+            <a:spLocks noGrp="1"/>
+          </p:cNvSpPr>
+          <p:nvPr>
+            <p:ph type="title"/>
+          </p:nvPr>
+        </p:nvSpPr>
+        <p:spPr/>
+        <p:txBody>
+          <a:bodyPr/>
+          <a:lstStyle/>
+          <a:p>
+            <a:r>
+              <a:rPr lang="en-US" dirty="0"/>
+              <a:t>The Manley Variable Mu</a:t>
+            </a:r>
+          </a:p>
+        </p:txBody>
+      </p:sp>
+      <p:sp>
+        <p:nvSpPr>
+          <p:cNvPr id="7" name="AutoShape 2" descr="Image">
+            <a:extLst>
+              <a:ext uri="{FF2B5EF4-FFF2-40B4-BE49-F238E27FC236}">
+                <a16:creationId xmlns:a16="http://schemas.microsoft.com/office/drawing/2014/main" id="{7D352224-49AD-0D91-98B0-8DC081748F84}"/>
+              </a:ext>
+            </a:extLst>
+          </p:cNvPr>
+          <p:cNvSpPr>
+            <a:spLocks noChangeAspect="1" noChangeArrowheads="1"/>
+          </p:cNvSpPr>
+          <p:nvPr/>
+        </p:nvSpPr>
+        <p:spPr bwMode="auto">
+          <a:xfrm>
+            <a:off x="5943600" y="3276600"/>
+            <a:ext cx="304800" cy="304800"/>
+          </a:xfrm>
+          <a:prstGeom prst="rect">
+            <a:avLst/>
+          </a:prstGeom>
+          <a:noFill/>
+          <a:extLst>
+            <a:ext uri="{909E8E84-426E-40DD-AFC4-6F175D3DCCD1}">
+              <a14:hiddenFill xmlns:a14="http://schemas.microsoft.com/office/drawing/2010/main">
+                <a:solidFill>
+                  <a:srgbClr val="FFFFFF"/>
+                </a:solidFill>
+              </a14:hiddenFill>
+            </a:ext>
+          </a:extLst>
+        </p:spPr>
+        <p:txBody>
+          <a:bodyPr vert="horz" wrap="square" lIns="91440" tIns="45720" rIns="91440" bIns="45720" numCol="1" anchor="t" anchorCtr="0" compatLnSpc="1">
+            <a:prstTxWarp prst="textNoShape">
+              <a:avLst/>
+            </a:prstTxWarp>
+          </a:bodyPr>
+          <a:lstStyle/>
+          <a:p>
+            <a:endParaRPr lang="en-US"/>
+          </a:p>
+        </p:txBody>
+      </p:sp>
+      <p:pic>
+        <p:nvPicPr>
+          <p:cNvPr id="8" name="Picture 7">
+            <a:extLst>
+              <a:ext uri="{FF2B5EF4-FFF2-40B4-BE49-F238E27FC236}">
+                <a16:creationId xmlns:a16="http://schemas.microsoft.com/office/drawing/2014/main" id="{B6BDC42A-36D8-E075-A367-03E26C5577B8}"/>
+              </a:ext>
+            </a:extLst>
+          </p:cNvPr>
+          <p:cNvPicPr>
+            <a:picLocks noChangeAspect="1"/>
+          </p:cNvPicPr>
+          <p:nvPr/>
+        </p:nvPicPr>
+        <p:blipFill>
+          <a:blip r:embed="rId2"/>
+          <a:stretch>
+            <a:fillRect/>
+          </a:stretch>
+        </p:blipFill>
+        <p:spPr>
+          <a:xfrm>
+            <a:off x="0" y="511389"/>
+            <a:ext cx="12192000" cy="4198925"/>
+          </a:xfrm>
+          <a:prstGeom prst="rect">
+            <a:avLst/>
+          </a:prstGeom>
+        </p:spPr>
+      </p:pic>
+      <p:sp>
+        <p:nvSpPr>
+          <p:cNvPr id="11" name="TextBox 10">
+            <a:extLst>
+              <a:ext uri="{FF2B5EF4-FFF2-40B4-BE49-F238E27FC236}">
+                <a16:creationId xmlns:a16="http://schemas.microsoft.com/office/drawing/2014/main" id="{46B8806C-4991-FBC3-A9C3-6FD604FB1074}"/>
+              </a:ext>
+            </a:extLst>
+          </p:cNvPr>
+          <p:cNvSpPr txBox="1"/>
+          <p:nvPr/>
+        </p:nvSpPr>
+        <p:spPr>
+          <a:xfrm>
+            <a:off x="838200" y="3581400"/>
+            <a:ext cx="10515600" cy="1415196"/>
+          </a:xfrm>
+          <a:prstGeom prst="rect">
+            <a:avLst/>
+          </a:prstGeom>
+          <a:noFill/>
+        </p:spPr>
+        <p:txBody>
+          <a:bodyPr wrap="square" rtlCol="0">
+            <a:spAutoFit/>
+          </a:bodyPr>
+          <a:lstStyle/>
+          <a:p>
+            <a:pPr>
+              <a:lnSpc>
+                <a:spcPct val="150000"/>
+              </a:lnSpc>
+            </a:pPr>
+            <a:r>
+              <a:rPr lang="en-US" sz="3200" dirty="0"/>
+              <a:t>Limit/Compress:</a:t>
+            </a:r>
+            <a:r>
+              <a:rPr lang="en-US" sz="2800" dirty="0"/>
+              <a:t> Selects compression ( 1.5:1) or limiting (4:1) function. Compress is soft-knee, Limit is a sharper knee.¹</a:t>
+            </a:r>
+            <a:endParaRPr lang="en-US" dirty="0"/>
+          </a:p>
+        </p:txBody>
+      </p:sp>
+      <p:sp>
+        <p:nvSpPr>
+          <p:cNvPr id="3" name="TextBox 2">
+            <a:extLst>
+              <a:ext uri="{FF2B5EF4-FFF2-40B4-BE49-F238E27FC236}">
+                <a16:creationId xmlns:a16="http://schemas.microsoft.com/office/drawing/2014/main" id="{F317C809-8165-6E11-8DEA-E2F8B50596F0}"/>
+              </a:ext>
+            </a:extLst>
+          </p:cNvPr>
+          <p:cNvSpPr txBox="1"/>
+          <p:nvPr/>
+        </p:nvSpPr>
+        <p:spPr>
+          <a:xfrm>
+            <a:off x="838200" y="6422175"/>
+            <a:ext cx="11113008" cy="369332"/>
+          </a:xfrm>
+          <a:prstGeom prst="rect">
+            <a:avLst/>
+          </a:prstGeom>
+          <a:noFill/>
+        </p:spPr>
+        <p:txBody>
+          <a:bodyPr wrap="square" rtlCol="0">
+            <a:spAutoFit/>
+          </a:bodyPr>
+          <a:lstStyle/>
+          <a:p>
+            <a:r>
+              <a:rPr lang="en-US" dirty="0"/>
+              <a:t>¹https://images.equipboard.com/uploads/item/manual/28965/manley-stereo-variable-mu-manual.pdf</a:t>
+            </a:r>
+          </a:p>
+        </p:txBody>
+      </p:sp>
+      <p:sp>
+        <p:nvSpPr>
+          <p:cNvPr id="5" name="Oval 4">
+            <a:extLst>
+              <a:ext uri="{FF2B5EF4-FFF2-40B4-BE49-F238E27FC236}">
+                <a16:creationId xmlns:a16="http://schemas.microsoft.com/office/drawing/2014/main" id="{EF2CA55A-D6A5-6C1E-AA50-0B8B46D4954D}"/>
+              </a:ext>
+            </a:extLst>
+          </p:cNvPr>
+          <p:cNvSpPr/>
+          <p:nvPr/>
+        </p:nvSpPr>
+        <p:spPr>
+          <a:xfrm>
+            <a:off x="3673810" y="2848130"/>
+            <a:ext cx="233398" cy="233398"/>
+          </a:xfrm>
+          <a:prstGeom prst="ellipse">
+            <a:avLst/>
+          </a:prstGeom>
+          <a:noFill/>
+          <a:ln>
+            <a:solidFill>
+              <a:srgbClr val="FF0000"/>
+            </a:solidFill>
+          </a:ln>
+        </p:spPr>
+        <p:style>
+          <a:lnRef idx="2">
+            <a:schemeClr val="accent1">
+              <a:shade val="15000"/>
+            </a:schemeClr>
+          </a:lnRef>
+          <a:fillRef idx="1">
+            <a:schemeClr val="accent1"/>
+          </a:fillRef>
+          <a:effectRef idx="0">
+            <a:schemeClr val="accent1"/>
+          </a:effectRef>
+          <a:fontRef idx="minor">
+            <a:schemeClr val="lt1"/>
+          </a:fontRef>
+        </p:style>
+        <p:txBody>
+          <a:bodyPr rtlCol="0" anchor="ctr"/>
+          <a:lstStyle/>
+          <a:p>
+            <a:pPr algn="ctr"/>
+            <a:endParaRPr lang="en-US"/>
+          </a:p>
+        </p:txBody>
+      </p:sp>
+    </p:spTree>
+    <p:extLst>
+      <p:ext uri="{BB962C8B-B14F-4D97-AF65-F5344CB8AC3E}">
+        <p14:creationId xmlns:p14="http://schemas.microsoft.com/office/powerpoint/2010/main" val="2403002270"/>
+      </p:ext>
+    </p:extLst>
+  </p:cSld>
+  <p:clrMapOvr>
+    <a:masterClrMapping/>
+  </p:clrMapOvr>
+</p:sld>
+</file>
+
+<file path=ppt/slides/slide11.xml><?xml version="1.0" encoding="utf-8"?>
+<p:sld xmlns:a="http://schemas.openxmlformats.org/drawingml/2006/main" xmlns:r="http://schemas.openxmlformats.org/officeDocument/2006/relationships" xmlns:p="http://schemas.openxmlformats.org/presentationml/2006/main">
+  <p:cSld>
+    <p:spTree>
+      <p:nvGrpSpPr>
+        <p:cNvPr id="1" name=""/>
+        <p:cNvGrpSpPr/>
+        <p:nvPr/>
+      </p:nvGrpSpPr>
+      <p:grpSpPr>
+        <a:xfrm>
+          <a:off x="0" y="0"/>
+          <a:ext cx="0" cy="0"/>
+          <a:chOff x="0" y="0"/>
+          <a:chExt cx="0" cy="0"/>
+        </a:xfrm>
+      </p:grpSpPr>
+      <p:sp>
+        <p:nvSpPr>
+          <p:cNvPr id="2" name="Title 1">
+            <a:extLst>
+              <a:ext uri="{FF2B5EF4-FFF2-40B4-BE49-F238E27FC236}">
+                <a16:creationId xmlns:a16="http://schemas.microsoft.com/office/drawing/2014/main" id="{38F8AC51-2A19-05BB-9C52-104EDEFDC48A}"/>
+              </a:ext>
+            </a:extLst>
+          </p:cNvPr>
+          <p:cNvSpPr>
+            <a:spLocks noGrp="1"/>
+          </p:cNvSpPr>
+          <p:nvPr>
+            <p:ph type="title"/>
+          </p:nvPr>
+        </p:nvSpPr>
+        <p:spPr/>
+        <p:txBody>
+          <a:bodyPr/>
+          <a:lstStyle/>
+          <a:p>
+            <a:r>
+              <a:rPr lang="en-US" dirty="0"/>
+              <a:t>For Mastering</a:t>
+            </a:r>
+          </a:p>
+        </p:txBody>
+      </p:sp>
+      <p:sp>
+        <p:nvSpPr>
+          <p:cNvPr id="3" name="Content Placeholder 2">
+            <a:extLst>
+              <a:ext uri="{FF2B5EF4-FFF2-40B4-BE49-F238E27FC236}">
+                <a16:creationId xmlns:a16="http://schemas.microsoft.com/office/drawing/2014/main" id="{17231B47-CF20-324C-463A-E1FC867A7AE0}"/>
+              </a:ext>
+            </a:extLst>
+          </p:cNvPr>
+          <p:cNvSpPr>
+            <a:spLocks noGrp="1"/>
+          </p:cNvSpPr>
+          <p:nvPr>
+            <p:ph idx="1"/>
+          </p:nvPr>
+        </p:nvSpPr>
+        <p:spPr/>
+        <p:txBody>
+          <a:bodyPr/>
+          <a:lstStyle/>
+          <a:p>
+            <a:pPr marL="0" indent="0">
+              <a:buNone/>
+            </a:pPr>
+            <a:r>
+              <a:rPr lang="en-US" dirty="0"/>
+              <a:t>The Manley Variable Mu provides gentle, warm tube compression.</a:t>
+            </a:r>
+          </a:p>
+          <a:p>
+            <a:pPr marL="0" indent="0">
+              <a:buNone/>
+            </a:pPr>
+            <a:endParaRPr lang="en-US" dirty="0"/>
+          </a:p>
+          <a:p>
+            <a:pPr marL="0" indent="0">
+              <a:buNone/>
+            </a:pPr>
+            <a:r>
+              <a:rPr lang="en-US" dirty="0"/>
+              <a:t>Slow attack times mean smooth transitions without damaging dynamic range.</a:t>
+            </a:r>
+          </a:p>
+          <a:p>
+            <a:pPr marL="0" indent="0">
+              <a:buNone/>
+            </a:pPr>
+            <a:endParaRPr lang="en-US" dirty="0"/>
+          </a:p>
+          <a:p>
+            <a:pPr marL="0" indent="0">
+              <a:buNone/>
+            </a:pPr>
+            <a:r>
+              <a:rPr lang="en-US" dirty="0"/>
+              <a:t>Produces sought-after tube saturation.</a:t>
+            </a:r>
+          </a:p>
+        </p:txBody>
+      </p:sp>
+    </p:spTree>
+    <p:extLst>
+      <p:ext uri="{BB962C8B-B14F-4D97-AF65-F5344CB8AC3E}">
+        <p14:creationId xmlns:p14="http://schemas.microsoft.com/office/powerpoint/2010/main" val="1640717770"/>
+      </p:ext>
+    </p:extLst>
+  </p:cSld>
+  <p:clrMapOvr>
+    <a:masterClrMapping/>
+  </p:clrMapOvr>
+</p:sld>
+</file>
+
+<file path=ppt/slides/slide12.xml><?xml version="1.0" encoding="utf-8"?>
+<p:sld xmlns:a="http://schemas.openxmlformats.org/drawingml/2006/main" xmlns:r="http://schemas.openxmlformats.org/officeDocument/2006/relationships" xmlns:p="http://schemas.openxmlformats.org/presentationml/2006/main">
+  <p:cSld>
+    <p:spTree>
+      <p:nvGrpSpPr>
+        <p:cNvPr id="1" name=""/>
+        <p:cNvGrpSpPr/>
+        <p:nvPr/>
+      </p:nvGrpSpPr>
+      <p:grpSpPr>
+        <a:xfrm>
+          <a:off x="0" y="0"/>
+          <a:ext cx="0" cy="0"/>
+          <a:chOff x="0" y="0"/>
+          <a:chExt cx="0" cy="0"/>
+        </a:xfrm>
+      </p:grpSpPr>
+      <p:sp>
+        <p:nvSpPr>
+          <p:cNvPr id="2" name="Title 1">
+            <a:extLst>
+              <a:ext uri="{FF2B5EF4-FFF2-40B4-BE49-F238E27FC236}">
+                <a16:creationId xmlns:a16="http://schemas.microsoft.com/office/drawing/2014/main" id="{E7FCE582-C25E-1200-047D-BFE1246BF8F8}"/>
+              </a:ext>
+            </a:extLst>
+          </p:cNvPr>
+          <p:cNvSpPr>
+            <a:spLocks noGrp="1"/>
+          </p:cNvSpPr>
+          <p:nvPr>
+            <p:ph type="title"/>
+          </p:nvPr>
+        </p:nvSpPr>
+        <p:spPr/>
+        <p:txBody>
+          <a:bodyPr/>
+          <a:lstStyle/>
+          <a:p>
+            <a:r>
+              <a:rPr lang="en-US" dirty="0"/>
+              <a:t>Attack – a strength and a weakness</a:t>
+            </a:r>
+          </a:p>
+        </p:txBody>
+      </p:sp>
+      <p:sp>
+        <p:nvSpPr>
+          <p:cNvPr id="3" name="Content Placeholder 2">
+            <a:extLst>
+              <a:ext uri="{FF2B5EF4-FFF2-40B4-BE49-F238E27FC236}">
+                <a16:creationId xmlns:a16="http://schemas.microsoft.com/office/drawing/2014/main" id="{34944530-3CC6-CBFE-6EF5-4DD79554AF08}"/>
+              </a:ext>
+            </a:extLst>
+          </p:cNvPr>
+          <p:cNvSpPr>
+            <a:spLocks noGrp="1"/>
+          </p:cNvSpPr>
+          <p:nvPr>
+            <p:ph idx="1"/>
+          </p:nvPr>
+        </p:nvSpPr>
+        <p:spPr>
+          <a:xfrm>
+            <a:off x="838200" y="1435608"/>
+            <a:ext cx="10515600" cy="5221223"/>
+          </a:xfrm>
+        </p:spPr>
+        <p:txBody>
+          <a:bodyPr/>
+          <a:lstStyle/>
+          <a:p>
+            <a:pPr marL="0" indent="0">
+              <a:buNone/>
+            </a:pPr>
+            <a:r>
+              <a:rPr lang="en-US" dirty="0"/>
+              <a:t>Slow attack can be great for gently treating a mix bus without noticeably hurting the dynamic range.</a:t>
+            </a:r>
+          </a:p>
+          <a:p>
+            <a:pPr marL="0" indent="0">
+              <a:buNone/>
+            </a:pPr>
+            <a:endParaRPr lang="en-US" dirty="0"/>
+          </a:p>
+          <a:p>
+            <a:pPr marL="0" indent="0">
+              <a:buNone/>
+            </a:pPr>
+            <a:r>
+              <a:rPr lang="en-US" dirty="0"/>
+              <a:t>However, the Manley Variable Mu’s slow attack times make it less useful for rapid transients.</a:t>
+            </a:r>
+          </a:p>
+          <a:p>
+            <a:pPr marL="0" indent="0">
+              <a:buNone/>
+            </a:pPr>
+            <a:endParaRPr lang="en-US" dirty="0"/>
+          </a:p>
+          <a:p>
+            <a:pPr marL="0" indent="0">
+              <a:buNone/>
+            </a:pPr>
+            <a:r>
+              <a:rPr lang="en-US" dirty="0"/>
+              <a:t>For comparison, the UA1176 has attack times in the microseconds, which is something the Variable Mu cannot compete with.</a:t>
+            </a:r>
+          </a:p>
+          <a:p>
+            <a:pPr marL="0" indent="0">
+              <a:buNone/>
+            </a:pPr>
+            <a:endParaRPr lang="en-US" dirty="0"/>
+          </a:p>
+          <a:p>
+            <a:pPr marL="0" indent="0">
+              <a:buNone/>
+            </a:pPr>
+            <a:r>
+              <a:rPr lang="en-US" dirty="0"/>
+              <a:t>Be careful with the settings if using the Variable Mu on sharp transient signals.</a:t>
+            </a:r>
+          </a:p>
+        </p:txBody>
+      </p:sp>
+    </p:spTree>
+    <p:extLst>
+      <p:ext uri="{BB962C8B-B14F-4D97-AF65-F5344CB8AC3E}">
+        <p14:creationId xmlns:p14="http://schemas.microsoft.com/office/powerpoint/2010/main" val="4045214453"/>
+      </p:ext>
+    </p:extLst>
+  </p:cSld>
+  <p:clrMapOvr>
+    <a:masterClrMapping/>
+  </p:clrMapOvr>
+</p:sld>
+</file>
+
+<file path=ppt/slides/slide13.xml><?xml version="1.0" encoding="utf-8"?>
+<p:sld xmlns:a="http://schemas.openxmlformats.org/drawingml/2006/main" xmlns:r="http://schemas.openxmlformats.org/officeDocument/2006/relationships" xmlns:p="http://schemas.openxmlformats.org/presentationml/2006/main">
+  <p:cSld>
+    <p:spTree>
+      <p:nvGrpSpPr>
+        <p:cNvPr id="1" name=""/>
+        <p:cNvGrpSpPr/>
+        <p:nvPr/>
+      </p:nvGrpSpPr>
+      <p:grpSpPr>
+        <a:xfrm>
+          <a:off x="0" y="0"/>
+          <a:ext cx="0" cy="0"/>
+          <a:chOff x="0" y="0"/>
+          <a:chExt cx="0" cy="0"/>
+        </a:xfrm>
+      </p:grpSpPr>
+      <p:sp>
+        <p:nvSpPr>
+          <p:cNvPr id="3" name="Content Placeholder 2">
+            <a:extLst>
+              <a:ext uri="{FF2B5EF4-FFF2-40B4-BE49-F238E27FC236}">
+                <a16:creationId xmlns:a16="http://schemas.microsoft.com/office/drawing/2014/main" id="{BDBDBFA0-E1B6-F81D-F140-EDFA5CF4D953}"/>
+              </a:ext>
+            </a:extLst>
+          </p:cNvPr>
+          <p:cNvSpPr>
+            <a:spLocks noGrp="1"/>
+          </p:cNvSpPr>
+          <p:nvPr>
+            <p:ph idx="1"/>
+          </p:nvPr>
+        </p:nvSpPr>
+        <p:spPr/>
+        <p:txBody>
+          <a:bodyPr/>
+          <a:lstStyle/>
+          <a:p>
+            <a:pPr marL="0" indent="0">
+              <a:buNone/>
+            </a:pPr>
+            <a:r>
+              <a:rPr lang="en-US" dirty="0"/>
+              <a:t>The Manley Variable Mu is not designed to solve every problem, but its strengths make it a great vari-mu mastering compressor.</a:t>
+            </a:r>
+          </a:p>
+          <a:p>
+            <a:pPr marL="0" indent="0">
+              <a:buNone/>
+            </a:pPr>
+            <a:endParaRPr lang="en-US" dirty="0"/>
+          </a:p>
+          <a:p>
+            <a:pPr marL="0" indent="0">
+              <a:buNone/>
+            </a:pPr>
+            <a:r>
+              <a:rPr lang="en-US" dirty="0"/>
+              <a:t>Understanding both its capabilities and its limitations is what ultimately allows it to serve the mix rather than reshape it.</a:t>
+            </a:r>
+          </a:p>
+        </p:txBody>
+      </p:sp>
+      <p:sp>
+        <p:nvSpPr>
+          <p:cNvPr id="4" name="Title 1">
+            <a:extLst>
+              <a:ext uri="{FF2B5EF4-FFF2-40B4-BE49-F238E27FC236}">
+                <a16:creationId xmlns:a16="http://schemas.microsoft.com/office/drawing/2014/main" id="{6B37261A-3F85-3E31-8A6D-CDCE8E778422}"/>
+              </a:ext>
+            </a:extLst>
+          </p:cNvPr>
+          <p:cNvSpPr>
+            <a:spLocks noGrp="1"/>
+          </p:cNvSpPr>
+          <p:nvPr>
+            <p:ph type="title"/>
+          </p:nvPr>
+        </p:nvSpPr>
+        <p:spPr>
+          <a:xfrm>
+            <a:off x="838200" y="365125"/>
+            <a:ext cx="10515600" cy="1325563"/>
+          </a:xfrm>
+        </p:spPr>
+        <p:txBody>
+          <a:bodyPr/>
+          <a:lstStyle/>
+          <a:p>
+            <a:r>
+              <a:rPr lang="en-US" dirty="0"/>
+              <a:t>The Manley Variable Mu</a:t>
+            </a:r>
+          </a:p>
+        </p:txBody>
+      </p:sp>
+    </p:spTree>
+    <p:extLst>
+      <p:ext uri="{BB962C8B-B14F-4D97-AF65-F5344CB8AC3E}">
+        <p14:creationId xmlns:p14="http://schemas.microsoft.com/office/powerpoint/2010/main" val="2626123628"/>
       </p:ext>
     </p:extLst>
   </p:cSld>
@@ -3431,7 +4183,7 @@
           <a:p>
             <a:r>
               <a:rPr lang="en-US" dirty="0"/>
-              <a:t>Vari-Mu</a:t>
+              <a:t>What makes a vari-mu?</a:t>
             </a:r>
           </a:p>
         </p:txBody>
@@ -3452,12 +4204,96 @@
             <p:ph idx="1"/>
           </p:nvPr>
         </p:nvSpPr>
-        <p:spPr/>
-        <p:txBody>
-          <a:bodyPr/>
-          <a:lstStyle/>
-          <a:p>
-            <a:endParaRPr lang="en-US" dirty="0"/>
+        <p:spPr>
+          <a:xfrm>
+            <a:off x="838200" y="1690688"/>
+            <a:ext cx="10515600" cy="4975288"/>
+          </a:xfrm>
+        </p:spPr>
+        <p:txBody>
+          <a:bodyPr>
+            <a:normAutofit/>
+          </a:bodyPr>
+          <a:lstStyle/>
+          <a:p>
+            <a:pPr marL="0" indent="0">
+              <a:buNone/>
+            </a:pPr>
+            <a:r>
+              <a:rPr lang="en-US" dirty="0"/>
+              <a:t>Vari-mu</a:t>
+            </a:r>
+          </a:p>
+          <a:p>
+            <a:pPr marL="0" indent="0">
+              <a:buNone/>
+            </a:pPr>
+            <a:r>
+              <a:rPr lang="en-US" dirty="0"/>
+              <a:t>	Mu (µ): Commonly refers to gain</a:t>
+            </a:r>
+          </a:p>
+          <a:p>
+            <a:pPr marL="0" indent="0">
+              <a:buNone/>
+            </a:pPr>
+            <a:r>
+              <a:rPr lang="en-US" dirty="0"/>
+              <a:t>	Vari: Variable or changing</a:t>
+            </a:r>
+          </a:p>
+          <a:p>
+            <a:pPr marL="0" indent="0">
+              <a:buNone/>
+            </a:pPr>
+            <a:r>
+              <a:rPr lang="en-US" dirty="0"/>
+              <a:t>Tubes/Valves</a:t>
+            </a:r>
+          </a:p>
+          <a:p>
+            <a:pPr marL="0" indent="0">
+              <a:buNone/>
+            </a:pPr>
+            <a:r>
+              <a:rPr lang="en-US" dirty="0"/>
+              <a:t>	A vacuum tube is used as the gain reduction component</a:t>
+            </a:r>
+          </a:p>
+          <a:p>
+            <a:pPr marL="0" indent="0">
+              <a:buNone/>
+            </a:pPr>
+            <a:r>
+              <a:rPr lang="en-US" dirty="0"/>
+              <a:t>	Other compressors use tubes for make-up gain, but those are 	</a:t>
+            </a:r>
+            <a:r>
+              <a:rPr lang="en-US" i="1" dirty="0"/>
+              <a:t>not</a:t>
+            </a:r>
+            <a:r>
+              <a:rPr lang="en-US" dirty="0"/>
+              <a:t> vari-mu</a:t>
+            </a:r>
+          </a:p>
+          <a:p>
+            <a:pPr marL="0" indent="0">
+              <a:buNone/>
+            </a:pPr>
+            <a:r>
+              <a:rPr lang="en-US" dirty="0"/>
+              <a:t>Ratio</a:t>
+            </a:r>
+          </a:p>
+          <a:p>
+            <a:pPr marL="0" indent="0">
+              <a:buNone/>
+            </a:pPr>
+            <a:r>
+              <a:rPr lang="en-US" dirty="0"/>
+              <a:t>	Vari-mu compressors are program-dependent, meaning ratio 	is determined by the input signal</a:t>
+            </a:r>
           </a:p>
         </p:txBody>
       </p:sp>
@@ -3465,6 +4301,1828 @@
     <p:extLst>
       <p:ext uri="{BB962C8B-B14F-4D97-AF65-F5344CB8AC3E}">
         <p14:creationId xmlns:p14="http://schemas.microsoft.com/office/powerpoint/2010/main" val="558461321"/>
+      </p:ext>
+    </p:extLst>
+  </p:cSld>
+  <p:clrMapOvr>
+    <a:masterClrMapping/>
+  </p:clrMapOvr>
+</p:sld>
+</file>
+
+<file path=ppt/slides/slide3.xml><?xml version="1.0" encoding="utf-8"?>
+<p:sld xmlns:a="http://schemas.openxmlformats.org/drawingml/2006/main" xmlns:r="http://schemas.openxmlformats.org/officeDocument/2006/relationships" xmlns:p="http://schemas.openxmlformats.org/presentationml/2006/main">
+  <p:cSld>
+    <p:spTree>
+      <p:nvGrpSpPr>
+        <p:cNvPr id="1" name=""/>
+        <p:cNvGrpSpPr/>
+        <p:nvPr/>
+      </p:nvGrpSpPr>
+      <p:grpSpPr>
+        <a:xfrm>
+          <a:off x="0" y="0"/>
+          <a:ext cx="0" cy="0"/>
+          <a:chOff x="0" y="0"/>
+          <a:chExt cx="0" cy="0"/>
+        </a:xfrm>
+      </p:grpSpPr>
+      <p:sp>
+        <p:nvSpPr>
+          <p:cNvPr id="2" name="Title 1">
+            <a:extLst>
+              <a:ext uri="{FF2B5EF4-FFF2-40B4-BE49-F238E27FC236}">
+                <a16:creationId xmlns:a16="http://schemas.microsoft.com/office/drawing/2014/main" id="{D2EF643F-F1D2-4A77-A8B5-E2C96ECC6D4A}"/>
+              </a:ext>
+            </a:extLst>
+          </p:cNvPr>
+          <p:cNvSpPr>
+            <a:spLocks noGrp="1"/>
+          </p:cNvSpPr>
+          <p:nvPr>
+            <p:ph type="title"/>
+          </p:nvPr>
+        </p:nvSpPr>
+        <p:spPr/>
+        <p:txBody>
+          <a:bodyPr/>
+          <a:lstStyle/>
+          <a:p>
+            <a:r>
+              <a:rPr lang="en-US" dirty="0"/>
+              <a:t>Vacuum Tubes (Valves)</a:t>
+            </a:r>
+          </a:p>
+        </p:txBody>
+      </p:sp>
+      <p:sp>
+        <p:nvSpPr>
+          <p:cNvPr id="3" name="Content Placeholder 2">
+            <a:extLst>
+              <a:ext uri="{FF2B5EF4-FFF2-40B4-BE49-F238E27FC236}">
+                <a16:creationId xmlns:a16="http://schemas.microsoft.com/office/drawing/2014/main" id="{CD6CFD95-5A20-9ADD-9273-B5D733DDE987}"/>
+              </a:ext>
+            </a:extLst>
+          </p:cNvPr>
+          <p:cNvSpPr>
+            <a:spLocks noGrp="1"/>
+          </p:cNvSpPr>
+          <p:nvPr>
+            <p:ph idx="1"/>
+          </p:nvPr>
+        </p:nvSpPr>
+        <p:spPr>
+          <a:xfrm>
+            <a:off x="838200" y="1463041"/>
+            <a:ext cx="10515600" cy="4764024"/>
+          </a:xfrm>
+        </p:spPr>
+        <p:txBody>
+          <a:bodyPr>
+            <a:normAutofit lnSpcReduction="10000"/>
+          </a:bodyPr>
+          <a:lstStyle/>
+          <a:p>
+            <a:pPr marL="0" indent="0">
+              <a:buNone/>
+            </a:pPr>
+            <a:r>
+              <a:rPr lang="en-US" dirty="0"/>
+              <a:t>An electrical device that controls current flow in a sealed vacuum between electrodes.¹</a:t>
+            </a:r>
+          </a:p>
+          <a:p>
+            <a:pPr marL="0" indent="0">
+              <a:buNone/>
+            </a:pPr>
+            <a:endParaRPr lang="en-US" dirty="0"/>
+          </a:p>
+          <a:p>
+            <a:pPr marL="0" indent="0">
+              <a:buNone/>
+            </a:pPr>
+            <a:r>
+              <a:rPr lang="en-US" dirty="0"/>
+              <a:t>Current between the anode and cathode is</a:t>
+            </a:r>
+          </a:p>
+          <a:p>
+            <a:pPr marL="0" indent="0">
+              <a:buNone/>
+            </a:pPr>
+            <a:r>
+              <a:rPr lang="en-US" dirty="0"/>
+              <a:t>disrupted by the grid. The more input signal that</a:t>
+            </a:r>
+          </a:p>
+          <a:p>
+            <a:pPr marL="0" indent="0">
+              <a:buNone/>
+            </a:pPr>
+            <a:r>
+              <a:rPr lang="en-US" dirty="0"/>
+              <a:t>is applied to the grid, the more current is allowed to</a:t>
+            </a:r>
+          </a:p>
+          <a:p>
+            <a:pPr marL="0" indent="0">
+              <a:buNone/>
+            </a:pPr>
+            <a:r>
+              <a:rPr lang="en-US" dirty="0"/>
+              <a:t>flow. </a:t>
+            </a:r>
+          </a:p>
+          <a:p>
+            <a:pPr marL="0" indent="0">
+              <a:buNone/>
+            </a:pPr>
+            <a:endParaRPr lang="en-US" dirty="0"/>
+          </a:p>
+          <a:p>
+            <a:pPr marL="0" indent="0">
+              <a:buNone/>
+            </a:pPr>
+            <a:r>
+              <a:rPr lang="en-US" dirty="0"/>
+              <a:t>Note that the cathode is heated, which is</a:t>
+            </a:r>
+          </a:p>
+          <a:p>
+            <a:pPr marL="0" indent="0">
+              <a:buNone/>
+            </a:pPr>
+            <a:r>
+              <a:rPr lang="en-US" dirty="0"/>
+              <a:t>why tube products must “warm up.”</a:t>
+            </a:r>
+          </a:p>
+        </p:txBody>
+      </p:sp>
+      <p:pic>
+        <p:nvPicPr>
+          <p:cNvPr id="4" name="Picture 3">
+            <a:extLst>
+              <a:ext uri="{FF2B5EF4-FFF2-40B4-BE49-F238E27FC236}">
+                <a16:creationId xmlns:a16="http://schemas.microsoft.com/office/drawing/2014/main" id="{7D9E3157-64A1-4349-37D1-C62FBD763960}"/>
+              </a:ext>
+            </a:extLst>
+          </p:cNvPr>
+          <p:cNvPicPr>
+            <a:picLocks noChangeAspect="1"/>
+          </p:cNvPicPr>
+          <p:nvPr/>
+        </p:nvPicPr>
+        <p:blipFill>
+          <a:blip r:embed="rId2"/>
+          <a:stretch>
+            <a:fillRect/>
+          </a:stretch>
+        </p:blipFill>
+        <p:spPr>
+          <a:xfrm>
+            <a:off x="8403336" y="2282562"/>
+            <a:ext cx="3041904" cy="4051816"/>
+          </a:xfrm>
+          <a:prstGeom prst="rect">
+            <a:avLst/>
+          </a:prstGeom>
+        </p:spPr>
+      </p:pic>
+      <p:sp>
+        <p:nvSpPr>
+          <p:cNvPr id="5" name="TextBox 4">
+            <a:extLst>
+              <a:ext uri="{FF2B5EF4-FFF2-40B4-BE49-F238E27FC236}">
+                <a16:creationId xmlns:a16="http://schemas.microsoft.com/office/drawing/2014/main" id="{461B155D-4159-3E50-0545-3063F354C010}"/>
+              </a:ext>
+            </a:extLst>
+          </p:cNvPr>
+          <p:cNvSpPr txBox="1"/>
+          <p:nvPr/>
+        </p:nvSpPr>
+        <p:spPr>
+          <a:xfrm>
+            <a:off x="838200" y="6422175"/>
+            <a:ext cx="6769608" cy="369332"/>
+          </a:xfrm>
+          <a:prstGeom prst="rect">
+            <a:avLst/>
+          </a:prstGeom>
+          <a:noFill/>
+        </p:spPr>
+        <p:txBody>
+          <a:bodyPr wrap="square" rtlCol="0">
+            <a:spAutoFit/>
+          </a:bodyPr>
+          <a:lstStyle/>
+          <a:p>
+            <a:r>
+              <a:rPr lang="en-US" dirty="0"/>
+              <a:t>¹https://foxmusicproduction.com/variable-mu-tube-compressors/</a:t>
+            </a:r>
+          </a:p>
+        </p:txBody>
+      </p:sp>
+    </p:spTree>
+    <p:extLst>
+      <p:ext uri="{BB962C8B-B14F-4D97-AF65-F5344CB8AC3E}">
+        <p14:creationId xmlns:p14="http://schemas.microsoft.com/office/powerpoint/2010/main" val="1529713414"/>
+      </p:ext>
+    </p:extLst>
+  </p:cSld>
+  <p:clrMapOvr>
+    <a:masterClrMapping/>
+  </p:clrMapOvr>
+</p:sld>
+</file>
+
+<file path=ppt/slides/slide4.xml><?xml version="1.0" encoding="utf-8"?>
+<p:sld xmlns:a="http://schemas.openxmlformats.org/drawingml/2006/main" xmlns:r="http://schemas.openxmlformats.org/officeDocument/2006/relationships" xmlns:p="http://schemas.openxmlformats.org/presentationml/2006/main">
+  <p:cSld>
+    <p:spTree>
+      <p:nvGrpSpPr>
+        <p:cNvPr id="1" name=""/>
+        <p:cNvGrpSpPr/>
+        <p:nvPr/>
+      </p:nvGrpSpPr>
+      <p:grpSpPr>
+        <a:xfrm>
+          <a:off x="0" y="0"/>
+          <a:ext cx="0" cy="0"/>
+          <a:chOff x="0" y="0"/>
+          <a:chExt cx="0" cy="0"/>
+        </a:xfrm>
+      </p:grpSpPr>
+      <p:sp>
+        <p:nvSpPr>
+          <p:cNvPr id="2" name="Title 1">
+            <a:extLst>
+              <a:ext uri="{FF2B5EF4-FFF2-40B4-BE49-F238E27FC236}">
+                <a16:creationId xmlns:a16="http://schemas.microsoft.com/office/drawing/2014/main" id="{19D0EE4D-96E5-F2F4-9A45-9FC44501A073}"/>
+              </a:ext>
+            </a:extLst>
+          </p:cNvPr>
+          <p:cNvSpPr>
+            <a:spLocks noGrp="1"/>
+          </p:cNvSpPr>
+          <p:nvPr>
+            <p:ph type="title"/>
+          </p:nvPr>
+        </p:nvSpPr>
+        <p:spPr/>
+        <p:txBody>
+          <a:bodyPr/>
+          <a:lstStyle/>
+          <a:p>
+            <a:r>
+              <a:rPr lang="en-US" dirty="0"/>
+              <a:t>The Manley Variable Mu</a:t>
+            </a:r>
+          </a:p>
+        </p:txBody>
+      </p:sp>
+      <p:sp>
+        <p:nvSpPr>
+          <p:cNvPr id="3" name="Content Placeholder 2">
+            <a:extLst>
+              <a:ext uri="{FF2B5EF4-FFF2-40B4-BE49-F238E27FC236}">
+                <a16:creationId xmlns:a16="http://schemas.microsoft.com/office/drawing/2014/main" id="{7A6F2FC2-135D-EF28-86A6-27EBCDE8F68C}"/>
+              </a:ext>
+            </a:extLst>
+          </p:cNvPr>
+          <p:cNvSpPr>
+            <a:spLocks noGrp="1"/>
+          </p:cNvSpPr>
+          <p:nvPr>
+            <p:ph idx="1"/>
+          </p:nvPr>
+        </p:nvSpPr>
+        <p:spPr>
+          <a:xfrm>
+            <a:off x="838200" y="4443859"/>
+            <a:ext cx="10515600" cy="2049016"/>
+          </a:xfrm>
+        </p:spPr>
+        <p:txBody>
+          <a:bodyPr>
+            <a:normAutofit/>
+          </a:bodyPr>
+          <a:lstStyle/>
+          <a:p>
+            <a:pPr marL="0" indent="0">
+              <a:buNone/>
+            </a:pPr>
+            <a:r>
+              <a:rPr lang="en-US" dirty="0"/>
+              <a:t>Released in 1994</a:t>
+            </a:r>
+          </a:p>
+          <a:p>
+            <a:pPr marL="0" indent="0">
+              <a:buNone/>
+            </a:pPr>
+            <a:r>
+              <a:rPr lang="en-US" dirty="0"/>
+              <a:t>Nonlinear</a:t>
+            </a:r>
+          </a:p>
+          <a:p>
+            <a:pPr marL="0" indent="0">
+              <a:buNone/>
+            </a:pPr>
+            <a:r>
+              <a:rPr lang="en-US" dirty="0"/>
+              <a:t>Program-dependent</a:t>
+            </a:r>
+          </a:p>
+          <a:p>
+            <a:pPr marL="0" indent="0">
+              <a:buNone/>
+            </a:pPr>
+            <a:r>
+              <a:rPr lang="en-US" dirty="0"/>
+              <a:t>Well suited for “gluing” a mix together</a:t>
+            </a:r>
+          </a:p>
+        </p:txBody>
+      </p:sp>
+      <p:pic>
+        <p:nvPicPr>
+          <p:cNvPr id="5" name="Picture 4">
+            <a:extLst>
+              <a:ext uri="{FF2B5EF4-FFF2-40B4-BE49-F238E27FC236}">
+                <a16:creationId xmlns:a16="http://schemas.microsoft.com/office/drawing/2014/main" id="{DCF0C474-9FC7-6C18-0E95-5DDCCD2AEC29}"/>
+              </a:ext>
+            </a:extLst>
+          </p:cNvPr>
+          <p:cNvPicPr>
+            <a:picLocks noChangeAspect="1"/>
+          </p:cNvPicPr>
+          <p:nvPr/>
+        </p:nvPicPr>
+        <p:blipFill>
+          <a:blip r:embed="rId2"/>
+          <a:stretch>
+            <a:fillRect/>
+          </a:stretch>
+        </p:blipFill>
+        <p:spPr>
+          <a:xfrm>
+            <a:off x="0" y="511389"/>
+            <a:ext cx="12192000" cy="4198925"/>
+          </a:xfrm>
+          <a:prstGeom prst="rect">
+            <a:avLst/>
+          </a:prstGeom>
+        </p:spPr>
+      </p:pic>
+    </p:spTree>
+    <p:extLst>
+      <p:ext uri="{BB962C8B-B14F-4D97-AF65-F5344CB8AC3E}">
+        <p14:creationId xmlns:p14="http://schemas.microsoft.com/office/powerpoint/2010/main" val="1640526184"/>
+      </p:ext>
+    </p:extLst>
+  </p:cSld>
+  <p:clrMapOvr>
+    <a:masterClrMapping/>
+  </p:clrMapOvr>
+</p:sld>
+</file>
+
+<file path=ppt/slides/slide5.xml><?xml version="1.0" encoding="utf-8"?>
+<p:sld xmlns:a="http://schemas.openxmlformats.org/drawingml/2006/main" xmlns:r="http://schemas.openxmlformats.org/officeDocument/2006/relationships" xmlns:p="http://schemas.openxmlformats.org/presentationml/2006/main">
+  <p:cSld>
+    <p:spTree>
+      <p:nvGrpSpPr>
+        <p:cNvPr id="1" name="">
+          <a:extLst>
+            <a:ext uri="{FF2B5EF4-FFF2-40B4-BE49-F238E27FC236}">
+              <a16:creationId xmlns:a16="http://schemas.microsoft.com/office/drawing/2014/main" id="{0A8EC012-247E-EA29-672B-044A95AE3F9D}"/>
+            </a:ext>
+          </a:extLst>
+        </p:cNvPr>
+        <p:cNvGrpSpPr/>
+        <p:nvPr/>
+      </p:nvGrpSpPr>
+      <p:grpSpPr>
+        <a:xfrm>
+          <a:off x="0" y="0"/>
+          <a:ext cx="0" cy="0"/>
+          <a:chOff x="0" y="0"/>
+          <a:chExt cx="0" cy="0"/>
+        </a:xfrm>
+      </p:grpSpPr>
+      <p:sp>
+        <p:nvSpPr>
+          <p:cNvPr id="2" name="Title 1">
+            <a:extLst>
+              <a:ext uri="{FF2B5EF4-FFF2-40B4-BE49-F238E27FC236}">
+                <a16:creationId xmlns:a16="http://schemas.microsoft.com/office/drawing/2014/main" id="{7ACAD323-271A-2E02-2539-53FAEE1920EC}"/>
+              </a:ext>
+            </a:extLst>
+          </p:cNvPr>
+          <p:cNvSpPr>
+            <a:spLocks noGrp="1"/>
+          </p:cNvSpPr>
+          <p:nvPr>
+            <p:ph type="title"/>
+          </p:nvPr>
+        </p:nvSpPr>
+        <p:spPr/>
+        <p:txBody>
+          <a:bodyPr/>
+          <a:lstStyle/>
+          <a:p>
+            <a:r>
+              <a:rPr lang="en-US" dirty="0"/>
+              <a:t>The Manley Variable Mu</a:t>
+            </a:r>
+          </a:p>
+        </p:txBody>
+      </p:sp>
+      <p:sp>
+        <p:nvSpPr>
+          <p:cNvPr id="7" name="AutoShape 2" descr="Image">
+            <a:extLst>
+              <a:ext uri="{FF2B5EF4-FFF2-40B4-BE49-F238E27FC236}">
+                <a16:creationId xmlns:a16="http://schemas.microsoft.com/office/drawing/2014/main" id="{E1B4C3DF-2AC8-7A49-F42D-DD4428E5B0A7}"/>
+              </a:ext>
+            </a:extLst>
+          </p:cNvPr>
+          <p:cNvSpPr>
+            <a:spLocks noChangeAspect="1" noChangeArrowheads="1"/>
+          </p:cNvSpPr>
+          <p:nvPr/>
+        </p:nvSpPr>
+        <p:spPr bwMode="auto">
+          <a:xfrm>
+            <a:off x="5943600" y="3276600"/>
+            <a:ext cx="304800" cy="304800"/>
+          </a:xfrm>
+          <a:prstGeom prst="rect">
+            <a:avLst/>
+          </a:prstGeom>
+          <a:noFill/>
+          <a:extLst>
+            <a:ext uri="{909E8E84-426E-40DD-AFC4-6F175D3DCCD1}">
+              <a14:hiddenFill xmlns:a14="http://schemas.microsoft.com/office/drawing/2010/main">
+                <a:solidFill>
+                  <a:srgbClr val="FFFFFF"/>
+                </a:solidFill>
+              </a14:hiddenFill>
+            </a:ext>
+          </a:extLst>
+        </p:spPr>
+        <p:txBody>
+          <a:bodyPr vert="horz" wrap="square" lIns="91440" tIns="45720" rIns="91440" bIns="45720" numCol="1" anchor="t" anchorCtr="0" compatLnSpc="1">
+            <a:prstTxWarp prst="textNoShape">
+              <a:avLst/>
+            </a:prstTxWarp>
+          </a:bodyPr>
+          <a:lstStyle/>
+          <a:p>
+            <a:endParaRPr lang="en-US"/>
+          </a:p>
+        </p:txBody>
+      </p:sp>
+      <p:pic>
+        <p:nvPicPr>
+          <p:cNvPr id="8" name="Picture 7">
+            <a:extLst>
+              <a:ext uri="{FF2B5EF4-FFF2-40B4-BE49-F238E27FC236}">
+                <a16:creationId xmlns:a16="http://schemas.microsoft.com/office/drawing/2014/main" id="{BCF8268A-F238-DD76-637E-B9F3F6D67725}"/>
+              </a:ext>
+            </a:extLst>
+          </p:cNvPr>
+          <p:cNvPicPr>
+            <a:picLocks noChangeAspect="1"/>
+          </p:cNvPicPr>
+          <p:nvPr/>
+        </p:nvPicPr>
+        <p:blipFill>
+          <a:blip r:embed="rId2"/>
+          <a:stretch>
+            <a:fillRect/>
+          </a:stretch>
+        </p:blipFill>
+        <p:spPr>
+          <a:xfrm>
+            <a:off x="0" y="511389"/>
+            <a:ext cx="12192000" cy="4198925"/>
+          </a:xfrm>
+          <a:prstGeom prst="rect">
+            <a:avLst/>
+          </a:prstGeom>
+        </p:spPr>
+      </p:pic>
+      <p:sp>
+        <p:nvSpPr>
+          <p:cNvPr id="9" name="Oval 8">
+            <a:extLst>
+              <a:ext uri="{FF2B5EF4-FFF2-40B4-BE49-F238E27FC236}">
+                <a16:creationId xmlns:a16="http://schemas.microsoft.com/office/drawing/2014/main" id="{C5CEC07C-30A4-5899-B6C9-F8BE7638CE65}"/>
+              </a:ext>
+            </a:extLst>
+          </p:cNvPr>
+          <p:cNvSpPr/>
+          <p:nvPr/>
+        </p:nvSpPr>
+        <p:spPr>
+          <a:xfrm>
+            <a:off x="5004749" y="2818371"/>
+            <a:ext cx="589547" cy="589547"/>
+          </a:xfrm>
+          <a:prstGeom prst="ellipse">
+            <a:avLst/>
+          </a:prstGeom>
+          <a:noFill/>
+          <a:ln>
+            <a:solidFill>
+              <a:srgbClr val="FF0000"/>
+            </a:solidFill>
+          </a:ln>
+        </p:spPr>
+        <p:style>
+          <a:lnRef idx="2">
+            <a:schemeClr val="accent1">
+              <a:shade val="15000"/>
+            </a:schemeClr>
+          </a:lnRef>
+          <a:fillRef idx="1">
+            <a:schemeClr val="accent1"/>
+          </a:fillRef>
+          <a:effectRef idx="0">
+            <a:schemeClr val="accent1"/>
+          </a:effectRef>
+          <a:fontRef idx="minor">
+            <a:schemeClr val="lt1"/>
+          </a:fontRef>
+        </p:style>
+        <p:txBody>
+          <a:bodyPr rtlCol="0" anchor="ctr"/>
+          <a:lstStyle/>
+          <a:p>
+            <a:pPr algn="ctr"/>
+            <a:endParaRPr lang="en-US"/>
+          </a:p>
+        </p:txBody>
+      </p:sp>
+      <p:sp>
+        <p:nvSpPr>
+          <p:cNvPr id="10" name="Oval 9">
+            <a:extLst>
+              <a:ext uri="{FF2B5EF4-FFF2-40B4-BE49-F238E27FC236}">
+                <a16:creationId xmlns:a16="http://schemas.microsoft.com/office/drawing/2014/main" id="{2C953B78-917B-D4C5-24ED-EB0C2A8E47AF}"/>
+              </a:ext>
+            </a:extLst>
+          </p:cNvPr>
+          <p:cNvSpPr/>
+          <p:nvPr/>
+        </p:nvSpPr>
+        <p:spPr>
+          <a:xfrm>
+            <a:off x="4243457" y="2212527"/>
+            <a:ext cx="447416" cy="447416"/>
+          </a:xfrm>
+          <a:prstGeom prst="ellipse">
+            <a:avLst/>
+          </a:prstGeom>
+          <a:noFill/>
+          <a:ln>
+            <a:solidFill>
+              <a:srgbClr val="FF0000"/>
+            </a:solidFill>
+          </a:ln>
+        </p:spPr>
+        <p:style>
+          <a:lnRef idx="2">
+            <a:schemeClr val="accent1">
+              <a:shade val="15000"/>
+            </a:schemeClr>
+          </a:lnRef>
+          <a:fillRef idx="1">
+            <a:schemeClr val="accent1"/>
+          </a:fillRef>
+          <a:effectRef idx="0">
+            <a:schemeClr val="accent1"/>
+          </a:effectRef>
+          <a:fontRef idx="minor">
+            <a:schemeClr val="lt1"/>
+          </a:fontRef>
+        </p:style>
+        <p:txBody>
+          <a:bodyPr rtlCol="0" anchor="ctr"/>
+          <a:lstStyle/>
+          <a:p>
+            <a:pPr algn="ctr"/>
+            <a:endParaRPr lang="en-US"/>
+          </a:p>
+        </p:txBody>
+      </p:sp>
+      <p:sp>
+        <p:nvSpPr>
+          <p:cNvPr id="11" name="TextBox 10">
+            <a:extLst>
+              <a:ext uri="{FF2B5EF4-FFF2-40B4-BE49-F238E27FC236}">
+                <a16:creationId xmlns:a16="http://schemas.microsoft.com/office/drawing/2014/main" id="{8A120C08-3C2D-4F5B-DCA6-0220A59C9555}"/>
+              </a:ext>
+            </a:extLst>
+          </p:cNvPr>
+          <p:cNvSpPr txBox="1"/>
+          <p:nvPr/>
+        </p:nvSpPr>
+        <p:spPr>
+          <a:xfrm>
+            <a:off x="838200" y="3581400"/>
+            <a:ext cx="4575048" cy="3108543"/>
+          </a:xfrm>
+          <a:prstGeom prst="rect">
+            <a:avLst/>
+          </a:prstGeom>
+          <a:noFill/>
+        </p:spPr>
+        <p:txBody>
+          <a:bodyPr wrap="square" rtlCol="0">
+            <a:spAutoFit/>
+          </a:bodyPr>
+          <a:lstStyle/>
+          <a:p>
+            <a:pPr>
+              <a:lnSpc>
+                <a:spcPct val="150000"/>
+              </a:lnSpc>
+            </a:pPr>
+            <a:r>
+              <a:rPr lang="en-US" sz="3200" dirty="0"/>
+              <a:t>Attack: 25ms – 70ms</a:t>
+            </a:r>
+          </a:p>
+          <a:p>
+            <a:pPr>
+              <a:lnSpc>
+                <a:spcPct val="150000"/>
+              </a:lnSpc>
+            </a:pPr>
+            <a:r>
+              <a:rPr lang="en-US" sz="3200" dirty="0"/>
+              <a:t>Recovery (Release):</a:t>
+            </a:r>
+          </a:p>
+          <a:p>
+            <a:pPr marL="457200" indent="-457200">
+              <a:buFont typeface="Arial" panose="020B0604020202020204" pitchFamily="34" charset="0"/>
+              <a:buChar char="•"/>
+            </a:pPr>
+            <a:r>
+              <a:rPr lang="en-US" sz="2000" dirty="0"/>
+              <a:t>VERY SLOW 		8 seconds</a:t>
+            </a:r>
+          </a:p>
+          <a:p>
+            <a:pPr marL="457200" indent="-457200">
+              <a:buFont typeface="Arial" panose="020B0604020202020204" pitchFamily="34" charset="0"/>
+              <a:buChar char="•"/>
+            </a:pPr>
+            <a:r>
+              <a:rPr lang="en-US" sz="2000" dirty="0"/>
+              <a:t>SLOW 		4 seconds</a:t>
+            </a:r>
+          </a:p>
+          <a:p>
+            <a:pPr marL="457200" indent="-457200">
+              <a:buFont typeface="Arial" panose="020B0604020202020204" pitchFamily="34" charset="0"/>
+              <a:buChar char="•"/>
+            </a:pPr>
+            <a:r>
+              <a:rPr lang="en-US" sz="2000" dirty="0"/>
+              <a:t>MEDIUM 		600 </a:t>
+            </a:r>
+            <a:r>
+              <a:rPr lang="en-US" sz="2000" dirty="0" err="1"/>
+              <a:t>ms</a:t>
+            </a:r>
+            <a:endParaRPr lang="en-US" sz="2000" dirty="0"/>
+          </a:p>
+          <a:p>
+            <a:pPr marL="457200" indent="-457200">
+              <a:buFont typeface="Arial" panose="020B0604020202020204" pitchFamily="34" charset="0"/>
+              <a:buChar char="•"/>
+            </a:pPr>
+            <a:r>
+              <a:rPr lang="en-US" sz="2000" dirty="0"/>
+              <a:t>FAST 		400 </a:t>
+            </a:r>
+            <a:r>
+              <a:rPr lang="en-US" sz="2000" dirty="0" err="1"/>
+              <a:t>ms</a:t>
+            </a:r>
+            <a:endParaRPr lang="en-US" sz="2000" dirty="0"/>
+          </a:p>
+          <a:p>
+            <a:pPr marL="457200" indent="-457200">
+              <a:buFont typeface="Arial" panose="020B0604020202020204" pitchFamily="34" charset="0"/>
+              <a:buChar char="•"/>
+            </a:pPr>
+            <a:r>
+              <a:rPr lang="en-US" sz="2000" dirty="0"/>
+              <a:t>VERY FAST 		200 </a:t>
+            </a:r>
+            <a:r>
+              <a:rPr lang="en-US" sz="2000" dirty="0" err="1"/>
+              <a:t>ms</a:t>
+            </a:r>
+            <a:endParaRPr lang="en-US" sz="2000" dirty="0"/>
+          </a:p>
+        </p:txBody>
+      </p:sp>
+      <p:sp>
+        <p:nvSpPr>
+          <p:cNvPr id="12" name="TextBox 11">
+            <a:extLst>
+              <a:ext uri="{FF2B5EF4-FFF2-40B4-BE49-F238E27FC236}">
+                <a16:creationId xmlns:a16="http://schemas.microsoft.com/office/drawing/2014/main" id="{D65A046C-2533-9B43-EEDB-DCA1E5BC2C71}"/>
+              </a:ext>
+            </a:extLst>
+          </p:cNvPr>
+          <p:cNvSpPr txBox="1"/>
+          <p:nvPr/>
+        </p:nvSpPr>
+        <p:spPr>
+          <a:xfrm>
+            <a:off x="8147304" y="5732859"/>
+            <a:ext cx="3206496" cy="760016"/>
+          </a:xfrm>
+          <a:prstGeom prst="rect">
+            <a:avLst/>
+          </a:prstGeom>
+          <a:noFill/>
+        </p:spPr>
+        <p:txBody>
+          <a:bodyPr wrap="square" rtlCol="0">
+            <a:spAutoFit/>
+          </a:bodyPr>
+          <a:lstStyle/>
+          <a:p>
+            <a:pPr algn="ctr">
+              <a:lnSpc>
+                <a:spcPct val="150000"/>
+              </a:lnSpc>
+            </a:pPr>
+            <a:r>
+              <a:rPr lang="en-US" sz="3200" dirty="0"/>
+              <a:t>(pretty slow)</a:t>
+            </a:r>
+            <a:endParaRPr lang="en-US" sz="2000" dirty="0"/>
+          </a:p>
+        </p:txBody>
+      </p:sp>
+    </p:spTree>
+    <p:extLst>
+      <p:ext uri="{BB962C8B-B14F-4D97-AF65-F5344CB8AC3E}">
+        <p14:creationId xmlns:p14="http://schemas.microsoft.com/office/powerpoint/2010/main" val="1402323940"/>
+      </p:ext>
+    </p:extLst>
+  </p:cSld>
+  <p:clrMapOvr>
+    <a:masterClrMapping/>
+  </p:clrMapOvr>
+</p:sld>
+</file>
+
+<file path=ppt/slides/slide6.xml><?xml version="1.0" encoding="utf-8"?>
+<p:sld xmlns:a="http://schemas.openxmlformats.org/drawingml/2006/main" xmlns:r="http://schemas.openxmlformats.org/officeDocument/2006/relationships" xmlns:p="http://schemas.openxmlformats.org/presentationml/2006/main">
+  <p:cSld>
+    <p:spTree>
+      <p:nvGrpSpPr>
+        <p:cNvPr id="1" name="">
+          <a:extLst>
+            <a:ext uri="{FF2B5EF4-FFF2-40B4-BE49-F238E27FC236}">
+              <a16:creationId xmlns:a16="http://schemas.microsoft.com/office/drawing/2014/main" id="{04F1E602-249E-6021-BEFE-1475F6E9F195}"/>
+            </a:ext>
+          </a:extLst>
+        </p:cNvPr>
+        <p:cNvGrpSpPr/>
+        <p:nvPr/>
+      </p:nvGrpSpPr>
+      <p:grpSpPr>
+        <a:xfrm>
+          <a:off x="0" y="0"/>
+          <a:ext cx="0" cy="0"/>
+          <a:chOff x="0" y="0"/>
+          <a:chExt cx="0" cy="0"/>
+        </a:xfrm>
+      </p:grpSpPr>
+      <p:sp>
+        <p:nvSpPr>
+          <p:cNvPr id="2" name="Title 1">
+            <a:extLst>
+              <a:ext uri="{FF2B5EF4-FFF2-40B4-BE49-F238E27FC236}">
+                <a16:creationId xmlns:a16="http://schemas.microsoft.com/office/drawing/2014/main" id="{C96A5064-F5AD-938C-BD78-AC0E2A26AD43}"/>
+              </a:ext>
+            </a:extLst>
+          </p:cNvPr>
+          <p:cNvSpPr>
+            <a:spLocks noGrp="1"/>
+          </p:cNvSpPr>
+          <p:nvPr>
+            <p:ph type="title"/>
+          </p:nvPr>
+        </p:nvSpPr>
+        <p:spPr/>
+        <p:txBody>
+          <a:bodyPr/>
+          <a:lstStyle/>
+          <a:p>
+            <a:r>
+              <a:rPr lang="en-US" dirty="0"/>
+              <a:t>The Manley Variable Mu</a:t>
+            </a:r>
+          </a:p>
+        </p:txBody>
+      </p:sp>
+      <p:sp>
+        <p:nvSpPr>
+          <p:cNvPr id="7" name="AutoShape 2" descr="Image">
+            <a:extLst>
+              <a:ext uri="{FF2B5EF4-FFF2-40B4-BE49-F238E27FC236}">
+                <a16:creationId xmlns:a16="http://schemas.microsoft.com/office/drawing/2014/main" id="{B08E4299-AEFA-0E8D-3982-8394D97465A8}"/>
+              </a:ext>
+            </a:extLst>
+          </p:cNvPr>
+          <p:cNvSpPr>
+            <a:spLocks noChangeAspect="1" noChangeArrowheads="1"/>
+          </p:cNvSpPr>
+          <p:nvPr/>
+        </p:nvSpPr>
+        <p:spPr bwMode="auto">
+          <a:xfrm>
+            <a:off x="5943600" y="3276600"/>
+            <a:ext cx="304800" cy="304800"/>
+          </a:xfrm>
+          <a:prstGeom prst="rect">
+            <a:avLst/>
+          </a:prstGeom>
+          <a:noFill/>
+          <a:extLst>
+            <a:ext uri="{909E8E84-426E-40DD-AFC4-6F175D3DCCD1}">
+              <a14:hiddenFill xmlns:a14="http://schemas.microsoft.com/office/drawing/2010/main">
+                <a:solidFill>
+                  <a:srgbClr val="FFFFFF"/>
+                </a:solidFill>
+              </a14:hiddenFill>
+            </a:ext>
+          </a:extLst>
+        </p:spPr>
+        <p:txBody>
+          <a:bodyPr vert="horz" wrap="square" lIns="91440" tIns="45720" rIns="91440" bIns="45720" numCol="1" anchor="t" anchorCtr="0" compatLnSpc="1">
+            <a:prstTxWarp prst="textNoShape">
+              <a:avLst/>
+            </a:prstTxWarp>
+          </a:bodyPr>
+          <a:lstStyle/>
+          <a:p>
+            <a:endParaRPr lang="en-US"/>
+          </a:p>
+        </p:txBody>
+      </p:sp>
+      <p:pic>
+        <p:nvPicPr>
+          <p:cNvPr id="8" name="Picture 7">
+            <a:extLst>
+              <a:ext uri="{FF2B5EF4-FFF2-40B4-BE49-F238E27FC236}">
+                <a16:creationId xmlns:a16="http://schemas.microsoft.com/office/drawing/2014/main" id="{7380CCC3-9BDF-DDB5-B2E9-6F86248CEA97}"/>
+              </a:ext>
+            </a:extLst>
+          </p:cNvPr>
+          <p:cNvPicPr>
+            <a:picLocks noChangeAspect="1"/>
+          </p:cNvPicPr>
+          <p:nvPr/>
+        </p:nvPicPr>
+        <p:blipFill>
+          <a:blip r:embed="rId2"/>
+          <a:stretch>
+            <a:fillRect/>
+          </a:stretch>
+        </p:blipFill>
+        <p:spPr>
+          <a:xfrm>
+            <a:off x="0" y="511389"/>
+            <a:ext cx="12192000" cy="4198925"/>
+          </a:xfrm>
+          <a:prstGeom prst="rect">
+            <a:avLst/>
+          </a:prstGeom>
+        </p:spPr>
+      </p:pic>
+      <p:sp>
+        <p:nvSpPr>
+          <p:cNvPr id="9" name="Oval 8">
+            <a:extLst>
+              <a:ext uri="{FF2B5EF4-FFF2-40B4-BE49-F238E27FC236}">
+                <a16:creationId xmlns:a16="http://schemas.microsoft.com/office/drawing/2014/main" id="{DEF5DA31-D2AD-6257-19A9-0100893BEF60}"/>
+              </a:ext>
+            </a:extLst>
+          </p:cNvPr>
+          <p:cNvSpPr/>
+          <p:nvPr/>
+        </p:nvSpPr>
+        <p:spPr>
+          <a:xfrm>
+            <a:off x="4202871" y="2821165"/>
+            <a:ext cx="589547" cy="589547"/>
+          </a:xfrm>
+          <a:prstGeom prst="ellipse">
+            <a:avLst/>
+          </a:prstGeom>
+          <a:noFill/>
+          <a:ln>
+            <a:solidFill>
+              <a:srgbClr val="FF0000"/>
+            </a:solidFill>
+          </a:ln>
+        </p:spPr>
+        <p:style>
+          <a:lnRef idx="2">
+            <a:schemeClr val="accent1">
+              <a:shade val="15000"/>
+            </a:schemeClr>
+          </a:lnRef>
+          <a:fillRef idx="1">
+            <a:schemeClr val="accent1"/>
+          </a:fillRef>
+          <a:effectRef idx="0">
+            <a:schemeClr val="accent1"/>
+          </a:effectRef>
+          <a:fontRef idx="minor">
+            <a:schemeClr val="lt1"/>
+          </a:fontRef>
+        </p:style>
+        <p:txBody>
+          <a:bodyPr rtlCol="0" anchor="ctr"/>
+          <a:lstStyle/>
+          <a:p>
+            <a:pPr algn="ctr"/>
+            <a:endParaRPr lang="en-US"/>
+          </a:p>
+        </p:txBody>
+      </p:sp>
+      <p:sp>
+        <p:nvSpPr>
+          <p:cNvPr id="11" name="TextBox 10">
+            <a:extLst>
+              <a:ext uri="{FF2B5EF4-FFF2-40B4-BE49-F238E27FC236}">
+                <a16:creationId xmlns:a16="http://schemas.microsoft.com/office/drawing/2014/main" id="{8B6D3472-DFE7-07DA-B991-781EE679A0AD}"/>
+              </a:ext>
+            </a:extLst>
+          </p:cNvPr>
+          <p:cNvSpPr txBox="1"/>
+          <p:nvPr/>
+        </p:nvSpPr>
+        <p:spPr>
+          <a:xfrm>
+            <a:off x="838200" y="3581400"/>
+            <a:ext cx="10040112" cy="1498680"/>
+          </a:xfrm>
+          <a:prstGeom prst="rect">
+            <a:avLst/>
+          </a:prstGeom>
+          <a:noFill/>
+        </p:spPr>
+        <p:txBody>
+          <a:bodyPr wrap="square" rtlCol="0">
+            <a:spAutoFit/>
+          </a:bodyPr>
+          <a:lstStyle/>
+          <a:p>
+            <a:pPr>
+              <a:lnSpc>
+                <a:spcPct val="150000"/>
+              </a:lnSpc>
+            </a:pPr>
+            <a:r>
+              <a:rPr lang="en-US" sz="3200" dirty="0"/>
+              <a:t>Threshold: The lower the threshold, the more that gets compressed.</a:t>
+            </a:r>
+            <a:endParaRPr lang="en-US" sz="2000" dirty="0"/>
+          </a:p>
+        </p:txBody>
+      </p:sp>
+    </p:spTree>
+    <p:extLst>
+      <p:ext uri="{BB962C8B-B14F-4D97-AF65-F5344CB8AC3E}">
+        <p14:creationId xmlns:p14="http://schemas.microsoft.com/office/powerpoint/2010/main" val="3431091237"/>
+      </p:ext>
+    </p:extLst>
+  </p:cSld>
+  <p:clrMapOvr>
+    <a:masterClrMapping/>
+  </p:clrMapOvr>
+</p:sld>
+</file>
+
+<file path=ppt/slides/slide7.xml><?xml version="1.0" encoding="utf-8"?>
+<p:sld xmlns:a="http://schemas.openxmlformats.org/drawingml/2006/main" xmlns:r="http://schemas.openxmlformats.org/officeDocument/2006/relationships" xmlns:p="http://schemas.openxmlformats.org/presentationml/2006/main">
+  <p:cSld>
+    <p:spTree>
+      <p:nvGrpSpPr>
+        <p:cNvPr id="1" name="">
+          <a:extLst>
+            <a:ext uri="{FF2B5EF4-FFF2-40B4-BE49-F238E27FC236}">
+              <a16:creationId xmlns:a16="http://schemas.microsoft.com/office/drawing/2014/main" id="{38A9DE71-BEC4-C57A-3F22-4E8BBB856DB7}"/>
+            </a:ext>
+          </a:extLst>
+        </p:cNvPr>
+        <p:cNvGrpSpPr/>
+        <p:nvPr/>
+      </p:nvGrpSpPr>
+      <p:grpSpPr>
+        <a:xfrm>
+          <a:off x="0" y="0"/>
+          <a:ext cx="0" cy="0"/>
+          <a:chOff x="0" y="0"/>
+          <a:chExt cx="0" cy="0"/>
+        </a:xfrm>
+      </p:grpSpPr>
+      <p:sp>
+        <p:nvSpPr>
+          <p:cNvPr id="2" name="Title 1">
+            <a:extLst>
+              <a:ext uri="{FF2B5EF4-FFF2-40B4-BE49-F238E27FC236}">
+                <a16:creationId xmlns:a16="http://schemas.microsoft.com/office/drawing/2014/main" id="{036746FD-2DE6-E9FC-B436-2653EDE65D86}"/>
+              </a:ext>
+            </a:extLst>
+          </p:cNvPr>
+          <p:cNvSpPr>
+            <a:spLocks noGrp="1"/>
+          </p:cNvSpPr>
+          <p:nvPr>
+            <p:ph type="title"/>
+          </p:nvPr>
+        </p:nvSpPr>
+        <p:spPr/>
+        <p:txBody>
+          <a:bodyPr/>
+          <a:lstStyle/>
+          <a:p>
+            <a:r>
+              <a:rPr lang="en-US" dirty="0"/>
+              <a:t>The Manley Variable Mu</a:t>
+            </a:r>
+          </a:p>
+        </p:txBody>
+      </p:sp>
+      <p:sp>
+        <p:nvSpPr>
+          <p:cNvPr id="7" name="AutoShape 2" descr="Image">
+            <a:extLst>
+              <a:ext uri="{FF2B5EF4-FFF2-40B4-BE49-F238E27FC236}">
+                <a16:creationId xmlns:a16="http://schemas.microsoft.com/office/drawing/2014/main" id="{09A7DFE8-4FE9-58A6-23C6-D8AFC241FA27}"/>
+              </a:ext>
+            </a:extLst>
+          </p:cNvPr>
+          <p:cNvSpPr>
+            <a:spLocks noChangeAspect="1" noChangeArrowheads="1"/>
+          </p:cNvSpPr>
+          <p:nvPr/>
+        </p:nvSpPr>
+        <p:spPr bwMode="auto">
+          <a:xfrm>
+            <a:off x="5943600" y="3276600"/>
+            <a:ext cx="304800" cy="304800"/>
+          </a:xfrm>
+          <a:prstGeom prst="rect">
+            <a:avLst/>
+          </a:prstGeom>
+          <a:noFill/>
+          <a:extLst>
+            <a:ext uri="{909E8E84-426E-40DD-AFC4-6F175D3DCCD1}">
+              <a14:hiddenFill xmlns:a14="http://schemas.microsoft.com/office/drawing/2010/main">
+                <a:solidFill>
+                  <a:srgbClr val="FFFFFF"/>
+                </a:solidFill>
+              </a14:hiddenFill>
+            </a:ext>
+          </a:extLst>
+        </p:spPr>
+        <p:txBody>
+          <a:bodyPr vert="horz" wrap="square" lIns="91440" tIns="45720" rIns="91440" bIns="45720" numCol="1" anchor="t" anchorCtr="0" compatLnSpc="1">
+            <a:prstTxWarp prst="textNoShape">
+              <a:avLst/>
+            </a:prstTxWarp>
+          </a:bodyPr>
+          <a:lstStyle/>
+          <a:p>
+            <a:endParaRPr lang="en-US"/>
+          </a:p>
+        </p:txBody>
+      </p:sp>
+      <p:pic>
+        <p:nvPicPr>
+          <p:cNvPr id="8" name="Picture 7">
+            <a:extLst>
+              <a:ext uri="{FF2B5EF4-FFF2-40B4-BE49-F238E27FC236}">
+                <a16:creationId xmlns:a16="http://schemas.microsoft.com/office/drawing/2014/main" id="{D42E0752-C5A2-B228-F1CC-6CEC0D24A401}"/>
+              </a:ext>
+            </a:extLst>
+          </p:cNvPr>
+          <p:cNvPicPr>
+            <a:picLocks noChangeAspect="1"/>
+          </p:cNvPicPr>
+          <p:nvPr/>
+        </p:nvPicPr>
+        <p:blipFill>
+          <a:blip r:embed="rId2"/>
+          <a:stretch>
+            <a:fillRect/>
+          </a:stretch>
+        </p:blipFill>
+        <p:spPr>
+          <a:xfrm>
+            <a:off x="0" y="511389"/>
+            <a:ext cx="12192000" cy="4198925"/>
+          </a:xfrm>
+          <a:prstGeom prst="rect">
+            <a:avLst/>
+          </a:prstGeom>
+        </p:spPr>
+      </p:pic>
+      <p:sp>
+        <p:nvSpPr>
+          <p:cNvPr id="11" name="TextBox 10">
+            <a:extLst>
+              <a:ext uri="{FF2B5EF4-FFF2-40B4-BE49-F238E27FC236}">
+                <a16:creationId xmlns:a16="http://schemas.microsoft.com/office/drawing/2014/main" id="{8879D261-DBDC-D5BE-342D-3CD1EE9B0424}"/>
+              </a:ext>
+            </a:extLst>
+          </p:cNvPr>
+          <p:cNvSpPr txBox="1"/>
+          <p:nvPr/>
+        </p:nvSpPr>
+        <p:spPr>
+          <a:xfrm>
+            <a:off x="838200" y="3581400"/>
+            <a:ext cx="10515600" cy="1415196"/>
+          </a:xfrm>
+          <a:prstGeom prst="rect">
+            <a:avLst/>
+          </a:prstGeom>
+          <a:noFill/>
+        </p:spPr>
+        <p:txBody>
+          <a:bodyPr wrap="square" rtlCol="0">
+            <a:spAutoFit/>
+          </a:bodyPr>
+          <a:lstStyle/>
+          <a:p>
+            <a:pPr>
+              <a:lnSpc>
+                <a:spcPct val="150000"/>
+              </a:lnSpc>
+            </a:pPr>
+            <a:r>
+              <a:rPr lang="en-US" sz="3200" dirty="0"/>
+              <a:t>Dual Input (Input Gain): </a:t>
+            </a:r>
+            <a:r>
+              <a:rPr lang="en-US" sz="2800" dirty="0"/>
+              <a:t>attenuation of input signal entering the amplifier limiting circuitry.</a:t>
+            </a:r>
+            <a:r>
+              <a:rPr lang="en-US" sz="2000" dirty="0"/>
+              <a:t>¹</a:t>
+            </a:r>
+          </a:p>
+        </p:txBody>
+      </p:sp>
+      <p:sp>
+        <p:nvSpPr>
+          <p:cNvPr id="3" name="TextBox 2">
+            <a:extLst>
+              <a:ext uri="{FF2B5EF4-FFF2-40B4-BE49-F238E27FC236}">
+                <a16:creationId xmlns:a16="http://schemas.microsoft.com/office/drawing/2014/main" id="{11A5C8AA-629A-7EF6-8D5A-771230AB6289}"/>
+              </a:ext>
+            </a:extLst>
+          </p:cNvPr>
+          <p:cNvSpPr txBox="1"/>
+          <p:nvPr/>
+        </p:nvSpPr>
+        <p:spPr>
+          <a:xfrm>
+            <a:off x="838200" y="6422175"/>
+            <a:ext cx="11113008" cy="369332"/>
+          </a:xfrm>
+          <a:prstGeom prst="rect">
+            <a:avLst/>
+          </a:prstGeom>
+          <a:noFill/>
+        </p:spPr>
+        <p:txBody>
+          <a:bodyPr wrap="square" rtlCol="0">
+            <a:spAutoFit/>
+          </a:bodyPr>
+          <a:lstStyle/>
+          <a:p>
+            <a:r>
+              <a:rPr lang="en-US" dirty="0"/>
+              <a:t>¹https://images.equipboard.com/uploads/item/manual/28965/manley-stereo-variable-mu-manual.pdf</a:t>
+            </a:r>
+          </a:p>
+        </p:txBody>
+      </p:sp>
+      <p:sp>
+        <p:nvSpPr>
+          <p:cNvPr id="4" name="Oval 3">
+            <a:extLst>
+              <a:ext uri="{FF2B5EF4-FFF2-40B4-BE49-F238E27FC236}">
+                <a16:creationId xmlns:a16="http://schemas.microsoft.com/office/drawing/2014/main" id="{6C0E68E4-707F-EDEA-0497-C7F3E11F6EB4}"/>
+              </a:ext>
+            </a:extLst>
+          </p:cNvPr>
+          <p:cNvSpPr/>
+          <p:nvPr/>
+        </p:nvSpPr>
+        <p:spPr>
+          <a:xfrm>
+            <a:off x="5880233" y="2194239"/>
+            <a:ext cx="447416" cy="447416"/>
+          </a:xfrm>
+          <a:prstGeom prst="ellipse">
+            <a:avLst/>
+          </a:prstGeom>
+          <a:noFill/>
+          <a:ln>
+            <a:solidFill>
+              <a:srgbClr val="FF0000"/>
+            </a:solidFill>
+          </a:ln>
+        </p:spPr>
+        <p:style>
+          <a:lnRef idx="2">
+            <a:schemeClr val="accent1">
+              <a:shade val="15000"/>
+            </a:schemeClr>
+          </a:lnRef>
+          <a:fillRef idx="1">
+            <a:schemeClr val="accent1"/>
+          </a:fillRef>
+          <a:effectRef idx="0">
+            <a:schemeClr val="accent1"/>
+          </a:effectRef>
+          <a:fontRef idx="minor">
+            <a:schemeClr val="lt1"/>
+          </a:fontRef>
+        </p:style>
+        <p:txBody>
+          <a:bodyPr rtlCol="0" anchor="ctr"/>
+          <a:lstStyle/>
+          <a:p>
+            <a:pPr algn="ctr"/>
+            <a:endParaRPr lang="en-US"/>
+          </a:p>
+        </p:txBody>
+      </p:sp>
+    </p:spTree>
+    <p:extLst>
+      <p:ext uri="{BB962C8B-B14F-4D97-AF65-F5344CB8AC3E}">
+        <p14:creationId xmlns:p14="http://schemas.microsoft.com/office/powerpoint/2010/main" val="389474116"/>
+      </p:ext>
+    </p:extLst>
+  </p:cSld>
+  <p:clrMapOvr>
+    <a:masterClrMapping/>
+  </p:clrMapOvr>
+</p:sld>
+</file>
+
+<file path=ppt/slides/slide8.xml><?xml version="1.0" encoding="utf-8"?>
+<p:sld xmlns:a="http://schemas.openxmlformats.org/drawingml/2006/main" xmlns:r="http://schemas.openxmlformats.org/officeDocument/2006/relationships" xmlns:p="http://schemas.openxmlformats.org/presentationml/2006/main">
+  <p:cSld>
+    <p:spTree>
+      <p:nvGrpSpPr>
+        <p:cNvPr id="1" name="">
+          <a:extLst>
+            <a:ext uri="{FF2B5EF4-FFF2-40B4-BE49-F238E27FC236}">
+              <a16:creationId xmlns:a16="http://schemas.microsoft.com/office/drawing/2014/main" id="{0E1A6395-7472-1F0E-AE94-8DF765EE2715}"/>
+            </a:ext>
+          </a:extLst>
+        </p:cNvPr>
+        <p:cNvGrpSpPr/>
+        <p:nvPr/>
+      </p:nvGrpSpPr>
+      <p:grpSpPr>
+        <a:xfrm>
+          <a:off x="0" y="0"/>
+          <a:ext cx="0" cy="0"/>
+          <a:chOff x="0" y="0"/>
+          <a:chExt cx="0" cy="0"/>
+        </a:xfrm>
+      </p:grpSpPr>
+      <p:sp>
+        <p:nvSpPr>
+          <p:cNvPr id="2" name="Title 1">
+            <a:extLst>
+              <a:ext uri="{FF2B5EF4-FFF2-40B4-BE49-F238E27FC236}">
+                <a16:creationId xmlns:a16="http://schemas.microsoft.com/office/drawing/2014/main" id="{FE989749-6609-A54F-7256-D284157954B2}"/>
+              </a:ext>
+            </a:extLst>
+          </p:cNvPr>
+          <p:cNvSpPr>
+            <a:spLocks noGrp="1"/>
+          </p:cNvSpPr>
+          <p:nvPr>
+            <p:ph type="title"/>
+          </p:nvPr>
+        </p:nvSpPr>
+        <p:spPr/>
+        <p:txBody>
+          <a:bodyPr/>
+          <a:lstStyle/>
+          <a:p>
+            <a:r>
+              <a:rPr lang="en-US" dirty="0"/>
+              <a:t>The Manley Variable Mu</a:t>
+            </a:r>
+          </a:p>
+        </p:txBody>
+      </p:sp>
+      <p:sp>
+        <p:nvSpPr>
+          <p:cNvPr id="7" name="AutoShape 2" descr="Image">
+            <a:extLst>
+              <a:ext uri="{FF2B5EF4-FFF2-40B4-BE49-F238E27FC236}">
+                <a16:creationId xmlns:a16="http://schemas.microsoft.com/office/drawing/2014/main" id="{F5476092-B763-F352-EBEE-73F3FCC318F0}"/>
+              </a:ext>
+            </a:extLst>
+          </p:cNvPr>
+          <p:cNvSpPr>
+            <a:spLocks noChangeAspect="1" noChangeArrowheads="1"/>
+          </p:cNvSpPr>
+          <p:nvPr/>
+        </p:nvSpPr>
+        <p:spPr bwMode="auto">
+          <a:xfrm>
+            <a:off x="5943600" y="3276600"/>
+            <a:ext cx="304800" cy="304800"/>
+          </a:xfrm>
+          <a:prstGeom prst="rect">
+            <a:avLst/>
+          </a:prstGeom>
+          <a:noFill/>
+          <a:extLst>
+            <a:ext uri="{909E8E84-426E-40DD-AFC4-6F175D3DCCD1}">
+              <a14:hiddenFill xmlns:a14="http://schemas.microsoft.com/office/drawing/2010/main">
+                <a:solidFill>
+                  <a:srgbClr val="FFFFFF"/>
+                </a:solidFill>
+              </a14:hiddenFill>
+            </a:ext>
+          </a:extLst>
+        </p:spPr>
+        <p:txBody>
+          <a:bodyPr vert="horz" wrap="square" lIns="91440" tIns="45720" rIns="91440" bIns="45720" numCol="1" anchor="t" anchorCtr="0" compatLnSpc="1">
+            <a:prstTxWarp prst="textNoShape">
+              <a:avLst/>
+            </a:prstTxWarp>
+          </a:bodyPr>
+          <a:lstStyle/>
+          <a:p>
+            <a:endParaRPr lang="en-US"/>
+          </a:p>
+        </p:txBody>
+      </p:sp>
+      <p:pic>
+        <p:nvPicPr>
+          <p:cNvPr id="8" name="Picture 7">
+            <a:extLst>
+              <a:ext uri="{FF2B5EF4-FFF2-40B4-BE49-F238E27FC236}">
+                <a16:creationId xmlns:a16="http://schemas.microsoft.com/office/drawing/2014/main" id="{B62DEFCA-31D2-7603-3C60-99F104BE2AD3}"/>
+              </a:ext>
+            </a:extLst>
+          </p:cNvPr>
+          <p:cNvPicPr>
+            <a:picLocks noChangeAspect="1"/>
+          </p:cNvPicPr>
+          <p:nvPr/>
+        </p:nvPicPr>
+        <p:blipFill>
+          <a:blip r:embed="rId2"/>
+          <a:stretch>
+            <a:fillRect/>
+          </a:stretch>
+        </p:blipFill>
+        <p:spPr>
+          <a:xfrm>
+            <a:off x="0" y="511389"/>
+            <a:ext cx="12192000" cy="4198925"/>
+          </a:xfrm>
+          <a:prstGeom prst="rect">
+            <a:avLst/>
+          </a:prstGeom>
+        </p:spPr>
+      </p:pic>
+      <p:sp>
+        <p:nvSpPr>
+          <p:cNvPr id="9" name="Oval 8">
+            <a:extLst>
+              <a:ext uri="{FF2B5EF4-FFF2-40B4-BE49-F238E27FC236}">
+                <a16:creationId xmlns:a16="http://schemas.microsoft.com/office/drawing/2014/main" id="{D534A714-DA26-BBE3-16B2-C93B48C0365E}"/>
+              </a:ext>
+            </a:extLst>
+          </p:cNvPr>
+          <p:cNvSpPr/>
+          <p:nvPr/>
+        </p:nvSpPr>
+        <p:spPr>
+          <a:xfrm>
+            <a:off x="4998399" y="2098789"/>
+            <a:ext cx="589547" cy="589547"/>
+          </a:xfrm>
+          <a:prstGeom prst="ellipse">
+            <a:avLst/>
+          </a:prstGeom>
+          <a:noFill/>
+          <a:ln>
+            <a:solidFill>
+              <a:srgbClr val="FF0000"/>
+            </a:solidFill>
+          </a:ln>
+        </p:spPr>
+        <p:style>
+          <a:lnRef idx="2">
+            <a:schemeClr val="accent1">
+              <a:shade val="15000"/>
+            </a:schemeClr>
+          </a:lnRef>
+          <a:fillRef idx="1">
+            <a:schemeClr val="accent1"/>
+          </a:fillRef>
+          <a:effectRef idx="0">
+            <a:schemeClr val="accent1"/>
+          </a:effectRef>
+          <a:fontRef idx="minor">
+            <a:schemeClr val="lt1"/>
+          </a:fontRef>
+        </p:style>
+        <p:txBody>
+          <a:bodyPr rtlCol="0" anchor="ctr"/>
+          <a:lstStyle/>
+          <a:p>
+            <a:pPr algn="ctr"/>
+            <a:endParaRPr lang="en-US"/>
+          </a:p>
+        </p:txBody>
+      </p:sp>
+      <p:sp>
+        <p:nvSpPr>
+          <p:cNvPr id="11" name="TextBox 10">
+            <a:extLst>
+              <a:ext uri="{FF2B5EF4-FFF2-40B4-BE49-F238E27FC236}">
+                <a16:creationId xmlns:a16="http://schemas.microsoft.com/office/drawing/2014/main" id="{871F515A-9511-CF44-2AFB-096F07C52722}"/>
+              </a:ext>
+            </a:extLst>
+          </p:cNvPr>
+          <p:cNvSpPr txBox="1"/>
+          <p:nvPr/>
+        </p:nvSpPr>
+        <p:spPr>
+          <a:xfrm>
+            <a:off x="838200" y="3581400"/>
+            <a:ext cx="10515600" cy="2061526"/>
+          </a:xfrm>
+          <a:prstGeom prst="rect">
+            <a:avLst/>
+          </a:prstGeom>
+          <a:noFill/>
+        </p:spPr>
+        <p:txBody>
+          <a:bodyPr wrap="square" rtlCol="0">
+            <a:spAutoFit/>
+          </a:bodyPr>
+          <a:lstStyle/>
+          <a:p>
+            <a:pPr>
+              <a:lnSpc>
+                <a:spcPct val="150000"/>
+              </a:lnSpc>
+            </a:pPr>
+            <a:r>
+              <a:rPr lang="en-US" sz="3200" dirty="0"/>
+              <a:t>Output Attenuate: </a:t>
+            </a:r>
+            <a:r>
+              <a:rPr lang="en-US" sz="2800" dirty="0"/>
+              <a:t>attenuation of output signal leaving the amplifier circuitry. Full attenuation occurs at the counterclockwise position.</a:t>
+            </a:r>
+            <a:r>
+              <a:rPr lang="en-US" sz="2000" dirty="0"/>
+              <a:t>¹</a:t>
+            </a:r>
+          </a:p>
+        </p:txBody>
+      </p:sp>
+      <p:sp>
+        <p:nvSpPr>
+          <p:cNvPr id="3" name="TextBox 2">
+            <a:extLst>
+              <a:ext uri="{FF2B5EF4-FFF2-40B4-BE49-F238E27FC236}">
+                <a16:creationId xmlns:a16="http://schemas.microsoft.com/office/drawing/2014/main" id="{97B88CF0-6486-7779-7AD4-01F23A9857F8}"/>
+              </a:ext>
+            </a:extLst>
+          </p:cNvPr>
+          <p:cNvSpPr txBox="1"/>
+          <p:nvPr/>
+        </p:nvSpPr>
+        <p:spPr>
+          <a:xfrm>
+            <a:off x="838200" y="6422175"/>
+            <a:ext cx="11113008" cy="369332"/>
+          </a:xfrm>
+          <a:prstGeom prst="rect">
+            <a:avLst/>
+          </a:prstGeom>
+          <a:noFill/>
+        </p:spPr>
+        <p:txBody>
+          <a:bodyPr wrap="square" rtlCol="0">
+            <a:spAutoFit/>
+          </a:bodyPr>
+          <a:lstStyle/>
+          <a:p>
+            <a:r>
+              <a:rPr lang="en-US" dirty="0"/>
+              <a:t>¹https://images.equipboard.com/uploads/item/manual/28965/manley-stereo-variable-mu-manual.pdf</a:t>
+            </a:r>
+          </a:p>
+        </p:txBody>
+      </p:sp>
+    </p:spTree>
+    <p:extLst>
+      <p:ext uri="{BB962C8B-B14F-4D97-AF65-F5344CB8AC3E}">
+        <p14:creationId xmlns:p14="http://schemas.microsoft.com/office/powerpoint/2010/main" val="2533198910"/>
+      </p:ext>
+    </p:extLst>
+  </p:cSld>
+  <p:clrMapOvr>
+    <a:masterClrMapping/>
+  </p:clrMapOvr>
+</p:sld>
+</file>
+
+<file path=ppt/slides/slide9.xml><?xml version="1.0" encoding="utf-8"?>
+<p:sld xmlns:a="http://schemas.openxmlformats.org/drawingml/2006/main" xmlns:r="http://schemas.openxmlformats.org/officeDocument/2006/relationships" xmlns:p="http://schemas.openxmlformats.org/presentationml/2006/main">
+  <p:cSld>
+    <p:spTree>
+      <p:nvGrpSpPr>
+        <p:cNvPr id="1" name="">
+          <a:extLst>
+            <a:ext uri="{FF2B5EF4-FFF2-40B4-BE49-F238E27FC236}">
+              <a16:creationId xmlns:a16="http://schemas.microsoft.com/office/drawing/2014/main" id="{9399BE75-83B9-BEC7-7A74-9C17BEFF3982}"/>
+            </a:ext>
+          </a:extLst>
+        </p:cNvPr>
+        <p:cNvGrpSpPr/>
+        <p:nvPr/>
+      </p:nvGrpSpPr>
+      <p:grpSpPr>
+        <a:xfrm>
+          <a:off x="0" y="0"/>
+          <a:ext cx="0" cy="0"/>
+          <a:chOff x="0" y="0"/>
+          <a:chExt cx="0" cy="0"/>
+        </a:xfrm>
+      </p:grpSpPr>
+      <p:sp>
+        <p:nvSpPr>
+          <p:cNvPr id="2" name="Title 1">
+            <a:extLst>
+              <a:ext uri="{FF2B5EF4-FFF2-40B4-BE49-F238E27FC236}">
+                <a16:creationId xmlns:a16="http://schemas.microsoft.com/office/drawing/2014/main" id="{60535E5E-83BC-A04B-9931-9789EFACC135}"/>
+              </a:ext>
+            </a:extLst>
+          </p:cNvPr>
+          <p:cNvSpPr>
+            <a:spLocks noGrp="1"/>
+          </p:cNvSpPr>
+          <p:nvPr>
+            <p:ph type="title"/>
+          </p:nvPr>
+        </p:nvSpPr>
+        <p:spPr/>
+        <p:txBody>
+          <a:bodyPr/>
+          <a:lstStyle/>
+          <a:p>
+            <a:r>
+              <a:rPr lang="en-US" dirty="0"/>
+              <a:t>The Manley Variable Mu</a:t>
+            </a:r>
+          </a:p>
+        </p:txBody>
+      </p:sp>
+      <p:sp>
+        <p:nvSpPr>
+          <p:cNvPr id="7" name="AutoShape 2" descr="Image">
+            <a:extLst>
+              <a:ext uri="{FF2B5EF4-FFF2-40B4-BE49-F238E27FC236}">
+                <a16:creationId xmlns:a16="http://schemas.microsoft.com/office/drawing/2014/main" id="{90EC419D-BCDF-74D8-0237-2D4718D09F68}"/>
+              </a:ext>
+            </a:extLst>
+          </p:cNvPr>
+          <p:cNvSpPr>
+            <a:spLocks noChangeAspect="1" noChangeArrowheads="1"/>
+          </p:cNvSpPr>
+          <p:nvPr/>
+        </p:nvSpPr>
+        <p:spPr bwMode="auto">
+          <a:xfrm>
+            <a:off x="5943600" y="3276600"/>
+            <a:ext cx="304800" cy="304800"/>
+          </a:xfrm>
+          <a:prstGeom prst="rect">
+            <a:avLst/>
+          </a:prstGeom>
+          <a:noFill/>
+          <a:extLst>
+            <a:ext uri="{909E8E84-426E-40DD-AFC4-6F175D3DCCD1}">
+              <a14:hiddenFill xmlns:a14="http://schemas.microsoft.com/office/drawing/2010/main">
+                <a:solidFill>
+                  <a:srgbClr val="FFFFFF"/>
+                </a:solidFill>
+              </a14:hiddenFill>
+            </a:ext>
+          </a:extLst>
+        </p:spPr>
+        <p:txBody>
+          <a:bodyPr vert="horz" wrap="square" lIns="91440" tIns="45720" rIns="91440" bIns="45720" numCol="1" anchor="t" anchorCtr="0" compatLnSpc="1">
+            <a:prstTxWarp prst="textNoShape">
+              <a:avLst/>
+            </a:prstTxWarp>
+          </a:bodyPr>
+          <a:lstStyle/>
+          <a:p>
+            <a:endParaRPr lang="en-US"/>
+          </a:p>
+        </p:txBody>
+      </p:sp>
+      <p:pic>
+        <p:nvPicPr>
+          <p:cNvPr id="8" name="Picture 7">
+            <a:extLst>
+              <a:ext uri="{FF2B5EF4-FFF2-40B4-BE49-F238E27FC236}">
+                <a16:creationId xmlns:a16="http://schemas.microsoft.com/office/drawing/2014/main" id="{8A3DA014-C1B0-3E94-8CF1-4C5092B85846}"/>
+              </a:ext>
+            </a:extLst>
+          </p:cNvPr>
+          <p:cNvPicPr>
+            <a:picLocks noChangeAspect="1"/>
+          </p:cNvPicPr>
+          <p:nvPr/>
+        </p:nvPicPr>
+        <p:blipFill>
+          <a:blip r:embed="rId2"/>
+          <a:stretch>
+            <a:fillRect/>
+          </a:stretch>
+        </p:blipFill>
+        <p:spPr>
+          <a:xfrm>
+            <a:off x="0" y="511389"/>
+            <a:ext cx="12192000" cy="4198925"/>
+          </a:xfrm>
+          <a:prstGeom prst="rect">
+            <a:avLst/>
+          </a:prstGeom>
+        </p:spPr>
+      </p:pic>
+      <p:sp>
+        <p:nvSpPr>
+          <p:cNvPr id="11" name="TextBox 10">
+            <a:extLst>
+              <a:ext uri="{FF2B5EF4-FFF2-40B4-BE49-F238E27FC236}">
+                <a16:creationId xmlns:a16="http://schemas.microsoft.com/office/drawing/2014/main" id="{3D73EA33-C4BC-D719-9E89-5652C3E92FCE}"/>
+              </a:ext>
+            </a:extLst>
+          </p:cNvPr>
+          <p:cNvSpPr txBox="1"/>
+          <p:nvPr/>
+        </p:nvSpPr>
+        <p:spPr>
+          <a:xfrm>
+            <a:off x="838200" y="3581400"/>
+            <a:ext cx="10515600" cy="3261855"/>
+          </a:xfrm>
+          <a:prstGeom prst="rect">
+            <a:avLst/>
+          </a:prstGeom>
+          <a:noFill/>
+        </p:spPr>
+        <p:txBody>
+          <a:bodyPr wrap="square" rtlCol="0">
+            <a:spAutoFit/>
+          </a:bodyPr>
+          <a:lstStyle/>
+          <a:p>
+            <a:pPr>
+              <a:lnSpc>
+                <a:spcPct val="150000"/>
+              </a:lnSpc>
+            </a:pPr>
+            <a:r>
+              <a:rPr lang="en-US" sz="2800" dirty="0"/>
+              <a:t>Where’s the ratio control?</a:t>
+            </a:r>
+          </a:p>
+          <a:p>
+            <a:pPr>
+              <a:lnSpc>
+                <a:spcPct val="150000"/>
+              </a:lnSpc>
+            </a:pPr>
+            <a:r>
+              <a:rPr lang="en-US" sz="2800" dirty="0"/>
+              <a:t>	Remember, ratio is determined by the input signal. If you want 	harsher compression, send more input gain.</a:t>
+            </a:r>
+          </a:p>
+          <a:p>
+            <a:pPr>
+              <a:lnSpc>
+                <a:spcPct val="150000"/>
+              </a:lnSpc>
+            </a:pPr>
+            <a:endParaRPr lang="en-US" sz="2800" dirty="0"/>
+          </a:p>
+          <a:p>
+            <a:pPr>
+              <a:lnSpc>
+                <a:spcPct val="150000"/>
+              </a:lnSpc>
+            </a:pPr>
+            <a:r>
+              <a:rPr lang="en-US" sz="2800" dirty="0"/>
+              <a:t>One small exception…</a:t>
+            </a:r>
+            <a:endParaRPr lang="en-US" dirty="0"/>
+          </a:p>
+        </p:txBody>
+      </p:sp>
+      <p:sp>
+        <p:nvSpPr>
+          <p:cNvPr id="4" name="Oval 3">
+            <a:extLst>
+              <a:ext uri="{FF2B5EF4-FFF2-40B4-BE49-F238E27FC236}">
+                <a16:creationId xmlns:a16="http://schemas.microsoft.com/office/drawing/2014/main" id="{1316A541-025A-DEB6-0749-45DCE2131885}"/>
+              </a:ext>
+            </a:extLst>
+          </p:cNvPr>
+          <p:cNvSpPr/>
+          <p:nvPr/>
+        </p:nvSpPr>
+        <p:spPr>
+          <a:xfrm>
+            <a:off x="5880233" y="2194239"/>
+            <a:ext cx="447416" cy="447416"/>
+          </a:xfrm>
+          <a:prstGeom prst="ellipse">
+            <a:avLst/>
+          </a:prstGeom>
+          <a:noFill/>
+          <a:ln>
+            <a:solidFill>
+              <a:srgbClr val="FF0000"/>
+            </a:solidFill>
+          </a:ln>
+        </p:spPr>
+        <p:style>
+          <a:lnRef idx="2">
+            <a:schemeClr val="accent1">
+              <a:shade val="15000"/>
+            </a:schemeClr>
+          </a:lnRef>
+          <a:fillRef idx="1">
+            <a:schemeClr val="accent1"/>
+          </a:fillRef>
+          <a:effectRef idx="0">
+            <a:schemeClr val="accent1"/>
+          </a:effectRef>
+          <a:fontRef idx="minor">
+            <a:schemeClr val="lt1"/>
+          </a:fontRef>
+        </p:style>
+        <p:txBody>
+          <a:bodyPr rtlCol="0" anchor="ctr"/>
+          <a:lstStyle/>
+          <a:p>
+            <a:pPr algn="ctr"/>
+            <a:endParaRPr lang="en-US"/>
+          </a:p>
+        </p:txBody>
+      </p:sp>
+    </p:spTree>
+    <p:extLst>
+      <p:ext uri="{BB962C8B-B14F-4D97-AF65-F5344CB8AC3E}">
+        <p14:creationId xmlns:p14="http://schemas.microsoft.com/office/powerpoint/2010/main" val="1443234551"/>
       </p:ext>
     </p:extLst>
   </p:cSld>
